--- a/docs/modules/swing-cortex/SWING_CORTEX_提案資料.pptx
+++ b/docs/modules/swing-cortex/SWING_CORTEX_提案資料.pptx
@@ -4,6 +4,9 @@
   <p:sldMasterIdLst>
     <p:sldMasterId id="2147483648" r:id="rId1"/>
   </p:sldMasterIdLst>
+  <p:notesMasterIdLst>
+    <p:notesMasterId r:id="rId13"/>
+  </p:notesMasterIdLst>
   <p:sldIdLst>
     <p:sldId id="256" r:id="rId2"/>
     <p:sldId id="257" r:id="rId3"/>
@@ -17,11 +20,8 @@
     <p:sldId id="265" r:id="rId11"/>
     <p:sldId id="266" r:id="rId12"/>
   </p:sldIdLst>
-  <p:notesMasterIdLst>
-    <p:notesMasterId r:id="rId13"/>
-  </p:notesMasterIdLst>
-  <p:sldSz cx="12191695" cy="6858000"/>
-  <p:notesSz cx="6858000" cy="12191695"/>
+  <p:sldSz cx="12192000" cy="6858000"/>
+  <p:notesSz cx="6858000" cy="12192000"/>
   <p:defaultTextStyle>
     <a:lvl1pPr marL="0" algn="l" defTabSz="914400" rtl="0" eaLnBrk="1" latinLnBrk="0" hangingPunct="1">
       <a:defRPr sz="1800" kern="1200">
@@ -114,6 +114,11 @@
       </a:defRPr>
     </a:lvl9pPr>
   </p:defaultTextStyle>
+  <p:extLst>
+    <p:ext uri="{EFAFB233-063F-42B5-8137-9DF3F51BA10A}">
+      <p15:sldGuideLst xmlns:p15="http://schemas.microsoft.com/office/powerpoint/2012/main"/>
+    </p:ext>
+  </p:extLst>
 </p:presentation>
 </file>
 
@@ -139,241 +144,17 @@
           <a:chExt cx="0" cy="0"/>
         </a:xfrm>
       </p:grpSpPr>
-      <p:sp>
-        <p:nvSpPr>
-          <p:cNvPr id="2" name="Header Placeholder 1"/>
-          <p:cNvSpPr>
-            <a:spLocks noGrp="1"/>
-          </p:cNvSpPr>
-          <p:nvPr>
-            <p:ph type="hdr" sz="quarter"/>
-          </p:nvPr>
-        </p:nvSpPr>
-        <p:spPr>
-          <a:xfrm>
-            <a:off x="0" y="0"/>
-            <a:ext cx="2971800" cy="458788"/>
-          </a:xfrm>
-          <a:prstGeom prst="rect">
-            <a:avLst/>
-          </a:prstGeom>
-        </p:spPr>
-        <p:txBody>
-          <a:bodyPr vert="horz" lIns="91440" tIns="45720" rIns="91440" bIns="45720" rtlCol="0"/>
-          <a:lstStyle>
-            <a:lvl1pPr algn="l">
-              <a:defRPr sz="1200"/>
-            </a:lvl1pPr>
-          </a:lstStyle>
-          <a:p>
-            <a:endParaRPr lang="en-US"/>
-          </a:p>
-        </p:txBody>
-      </p:sp>
-      <p:sp>
-        <p:nvSpPr>
-          <p:cNvPr id="3" name="Date Placeholder 2"/>
-          <p:cNvSpPr>
-            <a:spLocks noGrp="1"/>
-          </p:cNvSpPr>
-          <p:nvPr>
-            <p:ph type="dt" idx="1"/>
-          </p:nvPr>
-        </p:nvSpPr>
-        <p:spPr>
-          <a:xfrm>
-            <a:off x="3884613" y="0"/>
-            <a:ext cx="2971800" cy="458788"/>
-          </a:xfrm>
-          <a:prstGeom prst="rect">
-            <a:avLst/>
-          </a:prstGeom>
-        </p:spPr>
-        <p:txBody>
-          <a:bodyPr vert="horz" lIns="91440" tIns="45720" rIns="91440" bIns="45720" rtlCol="0"/>
-          <a:lstStyle>
-            <a:lvl1pPr algn="r">
-              <a:defRPr sz="1200"/>
-            </a:lvl1pPr>
-          </a:lstStyle>
-          <a:p>
-            <a:fld id="{5282F153-3F37-0F45-9E97-73ACFA13230C}" type="datetimeFigureOut">
-              <a:rPr lang="en-US"/>
-              <a:t>7/23/19</a:t>
-            </a:fld>
-            <a:endParaRPr lang="en-US"/>
-          </a:p>
-        </p:txBody>
-      </p:sp>
-      <p:sp>
-        <p:nvSpPr>
-          <p:cNvPr id="4" name="Slide Image Placeholder 3"/>
-          <p:cNvSpPr>
-            <a:spLocks noGrp="1" noRot="1" noChangeAspect="1"/>
-          </p:cNvSpPr>
-          <p:nvPr>
-            <p:ph type="sldImg" idx="2"/>
-          </p:nvPr>
-        </p:nvSpPr>
-        <p:spPr>
-          <a:xfrm>
-            <a:off x="685800" y="1143000"/>
-            <a:ext cx="5486400" cy="3086100"/>
-          </a:xfrm>
-          <a:prstGeom prst="rect">
-            <a:avLst/>
-          </a:prstGeom>
-          <a:noFill/>
-          <a:ln w="12700">
-            <a:solidFill>
-              <a:prstClr val="black"/>
-            </a:solidFill>
-          </a:ln>
-        </p:spPr>
-        <p:txBody>
-          <a:bodyPr vert="horz" lIns="91440" tIns="45720" rIns="91440" bIns="45720" rtlCol="0" anchor="ctr"/>
-          <a:lstStyle/>
-          <a:p>
-            <a:endParaRPr lang="en-US"/>
-          </a:p>
-        </p:txBody>
-      </p:sp>
-      <p:sp>
-        <p:nvSpPr>
-          <p:cNvPr id="5" name="Notes Placeholder 4"/>
-          <p:cNvSpPr>
-            <a:spLocks noGrp="1"/>
-          </p:cNvSpPr>
-          <p:nvPr>
-            <p:ph type="body" sz="quarter" idx="3"/>
-          </p:nvPr>
-        </p:nvSpPr>
-        <p:spPr>
-          <a:xfrm>
-            <a:off x="685800" y="4400550"/>
-            <a:ext cx="5486400" cy="3600450"/>
-          </a:xfrm>
-          <a:prstGeom prst="rect">
-            <a:avLst/>
-          </a:prstGeom>
-        </p:spPr>
-        <p:txBody>
-          <a:bodyPr vert="horz" lIns="91440" tIns="45720" rIns="91440" bIns="45720" rtlCol="0"/>
-          <a:lstStyle/>
-          <a:p>
-            <a:pPr lvl="0"/>
-            <a:r>
-              <a:rPr lang="en-US"/>
-              <a:t>Click to edit Master text styles</a:t>
-            </a:r>
-          </a:p>
-          <a:p>
-            <a:pPr lvl="1"/>
-            <a:r>
-              <a:rPr lang="en-US"/>
-              <a:t>Second level</a:t>
-            </a:r>
-          </a:p>
-          <a:p>
-            <a:pPr lvl="2"/>
-            <a:r>
-              <a:rPr lang="en-US"/>
-              <a:t>Third level</a:t>
-            </a:r>
-          </a:p>
-          <a:p>
-            <a:pPr lvl="3"/>
-            <a:r>
-              <a:rPr lang="en-US"/>
-              <a:t>Fourth level</a:t>
-            </a:r>
-          </a:p>
-          <a:p>
-            <a:pPr lvl="4"/>
-            <a:r>
-              <a:rPr lang="en-US"/>
-              <a:t>Fifth level</a:t>
-            </a:r>
-          </a:p>
-        </p:txBody>
-      </p:sp>
-      <p:sp>
-        <p:nvSpPr>
-          <p:cNvPr id="6" name="Footer Placeholder 5"/>
-          <p:cNvSpPr>
-            <a:spLocks noGrp="1"/>
-          </p:cNvSpPr>
-          <p:nvPr>
-            <p:ph type="ftr" sz="quarter" idx="4"/>
-          </p:nvPr>
-        </p:nvSpPr>
-        <p:spPr>
-          <a:xfrm>
-            <a:off x="0" y="8685213"/>
-            <a:ext cx="2971800" cy="458787"/>
-          </a:xfrm>
-          <a:prstGeom prst="rect">
-            <a:avLst/>
-          </a:prstGeom>
-        </p:spPr>
-        <p:txBody>
-          <a:bodyPr vert="horz" lIns="91440" tIns="45720" rIns="91440" bIns="45720" rtlCol="0" anchor="b"/>
-          <a:lstStyle>
-            <a:lvl1pPr algn="l">
-              <a:defRPr sz="1200"/>
-            </a:lvl1pPr>
-          </a:lstStyle>
-          <a:p>
-            <a:endParaRPr lang="en-US"/>
-          </a:p>
-        </p:txBody>
-      </p:sp>
-      <p:sp>
-        <p:nvSpPr>
-          <p:cNvPr id="7" name="Slide Number Placeholder 6"/>
-          <p:cNvSpPr>
-            <a:spLocks noGrp="1"/>
-          </p:cNvSpPr>
-          <p:nvPr>
-            <p:ph type="sldNum" sz="quarter" idx="5"/>
-          </p:nvPr>
-        </p:nvSpPr>
-        <p:spPr>
-          <a:xfrm>
-            <a:off x="3884613" y="8685213"/>
-            <a:ext cx="2971800" cy="458787"/>
-          </a:xfrm>
-          <a:prstGeom prst="rect">
-            <a:avLst/>
-          </a:prstGeom>
-        </p:spPr>
-        <p:txBody>
-          <a:bodyPr vert="horz" lIns="91440" tIns="45720" rIns="91440" bIns="45720" rtlCol="0" anchor="b"/>
-          <a:lstStyle>
-            <a:lvl1pPr algn="r">
-              <a:defRPr sz="1200"/>
-            </a:lvl1pPr>
-          </a:lstStyle>
-          <a:p>
-            <a:fld id="{CE5E9CC1-C706-0F49-92D6-E571CC5EEA8F}" type="slidenum">
-              <a:rPr lang="en-US"/>
-              <a:t>‹#›</a:t>
-            </a:fld>
-            <a:endParaRPr lang="en-US"/>
-          </a:p>
-        </p:txBody>
-      </p:sp>
     </p:spTree>
     <p:extLst>
       <p:ext uri="{BB962C8B-B14F-4D97-AF65-F5344CB8AC3E}">
-        <p14:creationId xmlns:p14="http://schemas.microsoft.com/office/powerpoint/2010/main" val="1024086991"/>
+        <p14:creationId xmlns:p14="http://schemas.microsoft.com/office/powerpoint/2010/main" val="2769609745"/>
       </p:ext>
     </p:extLst>
   </p:cSld>
   <p:clrMap bg1="lt1" tx1="dk1" bg2="lt2" tx2="dk2" accent1="accent1" accent2="accent2" accent3="accent3" accent4="accent4" accent5="accent5" accent6="accent6" hlink="hlink" folHlink="folHlink"/>
   <p:notesStyle>
     <a:lvl1pPr marL="0" algn="l" defTabSz="914400" rtl="0" eaLnBrk="1" latinLnBrk="0" hangingPunct="1">
-      <a:defRPr sz="1200" kern="1200">
+      <a:defRPr kumimoji="1" sz="1200" kern="1200">
         <a:solidFill>
           <a:schemeClr val="tx1"/>
         </a:solidFill>
@@ -383,7 +164,7 @@
       </a:defRPr>
     </a:lvl1pPr>
     <a:lvl2pPr marL="457200" algn="l" defTabSz="914400" rtl="0" eaLnBrk="1" latinLnBrk="0" hangingPunct="1">
-      <a:defRPr sz="1200" kern="1200">
+      <a:defRPr kumimoji="1" sz="1200" kern="1200">
         <a:solidFill>
           <a:schemeClr val="tx1"/>
         </a:solidFill>
@@ -393,7 +174,7 @@
       </a:defRPr>
     </a:lvl2pPr>
     <a:lvl3pPr marL="914400" algn="l" defTabSz="914400" rtl="0" eaLnBrk="1" latinLnBrk="0" hangingPunct="1">
-      <a:defRPr sz="1200" kern="1200">
+      <a:defRPr kumimoji="1" sz="1200" kern="1200">
         <a:solidFill>
           <a:schemeClr val="tx1"/>
         </a:solidFill>
@@ -403,7 +184,7 @@
       </a:defRPr>
     </a:lvl3pPr>
     <a:lvl4pPr marL="1371600" algn="l" defTabSz="914400" rtl="0" eaLnBrk="1" latinLnBrk="0" hangingPunct="1">
-      <a:defRPr sz="1200" kern="1200">
+      <a:defRPr kumimoji="1" sz="1200" kern="1200">
         <a:solidFill>
           <a:schemeClr val="tx1"/>
         </a:solidFill>
@@ -413,7 +194,7 @@
       </a:defRPr>
     </a:lvl4pPr>
     <a:lvl5pPr marL="1828800" algn="l" defTabSz="914400" rtl="0" eaLnBrk="1" latinLnBrk="0" hangingPunct="1">
-      <a:defRPr sz="1200" kern="1200">
+      <a:defRPr kumimoji="1" sz="1200" kern="1200">
         <a:solidFill>
           <a:schemeClr val="tx1"/>
         </a:solidFill>
@@ -423,7 +204,7 @@
       </a:defRPr>
     </a:lvl5pPr>
     <a:lvl6pPr marL="2286000" algn="l" defTabSz="914400" rtl="0" eaLnBrk="1" latinLnBrk="0" hangingPunct="1">
-      <a:defRPr sz="1200" kern="1200">
+      <a:defRPr kumimoji="1" sz="1200" kern="1200">
         <a:solidFill>
           <a:schemeClr val="tx1"/>
         </a:solidFill>
@@ -433,7 +214,7 @@
       </a:defRPr>
     </a:lvl6pPr>
     <a:lvl7pPr marL="2743200" algn="l" defTabSz="914400" rtl="0" eaLnBrk="1" latinLnBrk="0" hangingPunct="1">
-      <a:defRPr sz="1200" kern="1200">
+      <a:defRPr kumimoji="1" sz="1200" kern="1200">
         <a:solidFill>
           <a:schemeClr val="tx1"/>
         </a:solidFill>
@@ -443,7 +224,7 @@
       </a:defRPr>
     </a:lvl7pPr>
     <a:lvl8pPr marL="3200400" algn="l" defTabSz="914400" rtl="0" eaLnBrk="1" latinLnBrk="0" hangingPunct="1">
-      <a:defRPr sz="1200" kern="1200">
+      <a:defRPr kumimoji="1" sz="1200" kern="1200">
         <a:solidFill>
           <a:schemeClr val="tx1"/>
         </a:solidFill>
@@ -453,7 +234,7 @@
       </a:defRPr>
     </a:lvl8pPr>
     <a:lvl9pPr marL="3657600" algn="l" defTabSz="914400" rtl="0" eaLnBrk="1" latinLnBrk="0" hangingPunct="1">
-      <a:defRPr sz="1200" kern="1200">
+      <a:defRPr kumimoji="1" sz="1200" kern="1200">
         <a:solidFill>
           <a:schemeClr val="tx1"/>
         </a:solidFill>
@@ -510,10 +291,6 @@
           <a:bodyPr/>
           <a:lstStyle/>
           <a:p>
-            <a:r>
-              <a:rPr lang="en-US" dirty="0"/>
-              <a:t/>
-            </a:r>
             <a:endParaRPr lang="en-US" dirty="0"/>
           </a:p>
         </p:txBody>
@@ -598,10 +375,6 @@
           <a:bodyPr/>
           <a:lstStyle/>
           <a:p>
-            <a:r>
-              <a:rPr lang="en-US" dirty="0"/>
-              <a:t/>
-            </a:r>
             <a:endParaRPr lang="en-US" dirty="0"/>
           </a:p>
         </p:txBody>
@@ -686,10 +459,6 @@
           <a:bodyPr/>
           <a:lstStyle/>
           <a:p>
-            <a:r>
-              <a:rPr lang="en-US" dirty="0"/>
-              <a:t/>
-            </a:r>
             <a:endParaRPr lang="en-US" dirty="0"/>
           </a:p>
         </p:txBody>
@@ -774,10 +543,6 @@
           <a:bodyPr/>
           <a:lstStyle/>
           <a:p>
-            <a:r>
-              <a:rPr lang="en-US" dirty="0"/>
-              <a:t/>
-            </a:r>
             <a:endParaRPr lang="en-US" dirty="0"/>
           </a:p>
         </p:txBody>
@@ -862,10 +627,6 @@
           <a:bodyPr/>
           <a:lstStyle/>
           <a:p>
-            <a:r>
-              <a:rPr lang="en-US" dirty="0"/>
-              <a:t/>
-            </a:r>
             <a:endParaRPr lang="en-US" dirty="0"/>
           </a:p>
         </p:txBody>
@@ -950,10 +711,6 @@
           <a:bodyPr/>
           <a:lstStyle/>
           <a:p>
-            <a:r>
-              <a:rPr lang="en-US" dirty="0"/>
-              <a:t/>
-            </a:r>
             <a:endParaRPr lang="en-US" dirty="0"/>
           </a:p>
         </p:txBody>
@@ -1038,10 +795,6 @@
           <a:bodyPr/>
           <a:lstStyle/>
           <a:p>
-            <a:r>
-              <a:rPr lang="en-US" dirty="0"/>
-              <a:t/>
-            </a:r>
             <a:endParaRPr lang="en-US" dirty="0"/>
           </a:p>
         </p:txBody>
@@ -1126,10 +879,6 @@
           <a:bodyPr/>
           <a:lstStyle/>
           <a:p>
-            <a:r>
-              <a:rPr lang="en-US" dirty="0"/>
-              <a:t/>
-            </a:r>
             <a:endParaRPr lang="en-US" dirty="0"/>
           </a:p>
         </p:txBody>
@@ -1214,10 +963,6 @@
           <a:bodyPr/>
           <a:lstStyle/>
           <a:p>
-            <a:r>
-              <a:rPr lang="en-US" dirty="0"/>
-              <a:t/>
-            </a:r>
             <a:endParaRPr lang="en-US" dirty="0"/>
           </a:p>
         </p:txBody>
@@ -1302,10 +1047,6 @@
           <a:bodyPr/>
           <a:lstStyle/>
           <a:p>
-            <a:r>
-              <a:rPr lang="en-US" dirty="0"/>
-              <a:t/>
-            </a:r>
             <a:endParaRPr lang="en-US" dirty="0"/>
           </a:p>
         </p:txBody>
@@ -1390,10 +1131,6 @@
           <a:bodyPr/>
           <a:lstStyle/>
           <a:p>
-            <a:r>
-              <a:rPr lang="en-US" dirty="0"/>
-              <a:t/>
-            </a:r>
             <a:endParaRPr lang="en-US" dirty="0"/>
           </a:p>
         </p:txBody>
@@ -1467,6 +1204,11 @@
 <file path=ppt/slideMasters/slideMaster1.xml><?xml version="1.0" encoding="utf-8"?>
 <p:sldMaster xmlns:a="http://schemas.openxmlformats.org/drawingml/2006/main" xmlns:r="http://schemas.openxmlformats.org/officeDocument/2006/relationships" xmlns:p="http://schemas.openxmlformats.org/presentationml/2006/main">
   <p:cSld>
+    <p:bg>
+      <p:bgRef idx="1001">
+        <a:schemeClr val="bg1"/>
+      </p:bgRef>
+    </p:bg>
     <p:spTree>
       <p:nvGrpSpPr>
         <p:cNvPr id="1" name=""/>
@@ -1749,6 +1491,7 @@
         <a:solidFill>
           <a:srgbClr val="0F766E"/>
         </a:solidFill>
+        <a:effectLst/>
       </p:bgPr>
     </p:bg>
     <p:spTree>
@@ -1854,7 +1597,7 @@
           <a:bodyPr wrap="square" rtlCol="0" anchor="ctr"/>
           <a:lstStyle/>
           <a:p>
-            <a:pPr algn="ctr" indent="0" marL="0">
+            <a:pPr marL="0" indent="0" algn="ctr">
               <a:buNone/>
             </a:pPr>
             <a:r>
@@ -1893,11 +1636,11 @@
           <a:bodyPr wrap="square" rtlCol="0" anchor="ctr"/>
           <a:lstStyle/>
           <a:p>
-            <a:pPr indent="0" marL="0">
-              <a:buNone/>
-            </a:pPr>
-            <a:r>
-              <a:rPr lang="en-US" sz="1800" b="1" spc="100" kern="0" dirty="0">
+            <a:pPr marL="0" indent="0">
+              <a:buNone/>
+            </a:pPr>
+            <a:r>
+              <a:rPr lang="en-US" sz="1800" b="1" kern="0" spc="100" dirty="0">
                 <a:solidFill>
                   <a:srgbClr val="FFFFFF"/>
                 </a:solidFill>
@@ -1907,11 +1650,8 @@
               </a:rPr>
               <a:t>SWING </a:t>
             </a:r>
-            <a:pPr indent="0" marL="0">
-              <a:buNone/>
-            </a:pPr>
-            <a:r>
-              <a:rPr lang="en-US" sz="1800" spc="100" kern="0" dirty="0">
+            <a:r>
+              <a:rPr lang="en-US" sz="1800" kern="0" spc="100" dirty="0">
                 <a:solidFill>
                   <a:srgbClr val="FFFFFF"/>
                 </a:solidFill>
@@ -1946,7 +1686,7 @@
           <a:bodyPr wrap="square" rtlCol="0" anchor="ctr"/>
           <a:lstStyle/>
           <a:p>
-            <a:pPr indent="0" marL="0">
+            <a:pPr marL="0" indent="0">
               <a:lnSpc>
                 <a:spcPct val="105000"/>
               </a:lnSpc>
@@ -1966,7 +1706,7 @@
             <a:endParaRPr lang="en-US" sz="4600" dirty="0"/>
           </a:p>
           <a:p>
-            <a:pPr indent="0" marL="0">
+            <a:pPr marL="0" indent="0">
               <a:lnSpc>
                 <a:spcPct val="105000"/>
               </a:lnSpc>
@@ -2008,7 +1748,7 @@
           <a:bodyPr wrap="square" rtlCol="0" anchor="ctr"/>
           <a:lstStyle/>
           <a:p>
-            <a:pPr indent="0" marL="0">
+            <a:pPr marL="0" indent="0">
               <a:buNone/>
             </a:pPr>
             <a:r>
@@ -2047,7 +1787,7 @@
           <a:bodyPr wrap="square" rtlCol="0" anchor="ctr"/>
           <a:lstStyle/>
           <a:p>
-            <a:pPr indent="0" marL="0">
+            <a:pPr marL="0" indent="0">
               <a:lnSpc>
                 <a:spcPct val="130000"/>
               </a:lnSpc>
@@ -2067,7 +1807,7 @@
             <a:endParaRPr lang="en-US" sz="1400" dirty="0"/>
           </a:p>
           <a:p>
-            <a:pPr indent="0" marL="0">
+            <a:pPr marL="0" indent="0">
               <a:lnSpc>
                 <a:spcPct val="130000"/>
               </a:lnSpc>
@@ -2133,7 +1873,7 @@
           <a:bodyPr wrap="square" rtlCol="0" anchor="ctr"/>
           <a:lstStyle/>
           <a:p>
-            <a:pPr algn="ctr" indent="0" marL="0">
+            <a:pPr marL="0" indent="0" algn="ctr">
               <a:buNone/>
             </a:pPr>
             <a:r>
@@ -2196,7 +1936,7 @@
           <a:bodyPr wrap="square" rtlCol="0" anchor="ctr"/>
           <a:lstStyle/>
           <a:p>
-            <a:pPr algn="ctr" indent="0" marL="0">
+            <a:pPr marL="0" indent="0" algn="ctr">
               <a:buNone/>
             </a:pPr>
             <a:r>
@@ -2230,6 +1970,7 @@
         <a:solidFill>
           <a:srgbClr val="FFFFFF"/>
         </a:solidFill>
+        <a:effectLst/>
       </p:bgPr>
     </p:bg>
     <p:spTree>
@@ -2267,11 +2008,11 @@
           <a:bodyPr wrap="square" rtlCol="0" anchor="ctr"/>
           <a:lstStyle/>
           <a:p>
-            <a:pPr indent="0" marL="0">
-              <a:buNone/>
-            </a:pPr>
-            <a:r>
-              <a:rPr lang="en-US" sz="1100" b="1" spc="200" kern="0" dirty="0">
+            <a:pPr marL="0" indent="0">
+              <a:buNone/>
+            </a:pPr>
+            <a:r>
+              <a:rPr lang="en-US" sz="1100" b="1" kern="0" spc="200" dirty="0">
                 <a:solidFill>
                   <a:srgbClr val="0D9488"/>
                 </a:solidFill>
@@ -2306,7 +2047,7 @@
           <a:bodyPr wrap="square" rtlCol="0" anchor="ctr"/>
           <a:lstStyle/>
           <a:p>
-            <a:pPr indent="0" marL="0">
+            <a:pPr marL="0" indent="0">
               <a:buNone/>
             </a:pPr>
             <a:r>
@@ -2347,9 +2088,27 @@
             <a:tbl>
               <a:tblPr/>
               <a:tblGrid>
-                <a:gridCol w="6492240"/>
-                <a:gridCol w="2011680"/>
-                <a:gridCol w="2011680"/>
+                <a:gridCol w="6492240">
+                  <a:extLst>
+                    <a:ext uri="{9D8B030D-6E8A-4147-A177-3AD203B41FA5}">
+                      <a16:colId xmlns:a16="http://schemas.microsoft.com/office/drawing/2014/main" val="20000"/>
+                    </a:ext>
+                  </a:extLst>
+                </a:gridCol>
+                <a:gridCol w="2011680">
+                  <a:extLst>
+                    <a:ext uri="{9D8B030D-6E8A-4147-A177-3AD203B41FA5}">
+                      <a16:colId xmlns:a16="http://schemas.microsoft.com/office/drawing/2014/main" val="20001"/>
+                    </a:ext>
+                  </a:extLst>
+                </a:gridCol>
+                <a:gridCol w="2011680">
+                  <a:extLst>
+                    <a:ext uri="{9D8B030D-6E8A-4147-A177-3AD203B41FA5}">
+                      <a16:colId xmlns:a16="http://schemas.microsoft.com/office/drawing/2014/main" val="20002"/>
+                    </a:ext>
+                  </a:extLst>
+                </a:gridCol>
               </a:tblGrid>
               <a:tr h="566928">
                 <a:tc>
@@ -2357,7 +2116,7 @@
                     <a:bodyPr/>
                     <a:lstStyle/>
                     <a:p>
-                      <a:pPr algn="l" indent="0" marL="0">
+                      <a:pPr marL="0" indent="0" algn="l">
                         <a:buNone/>
                       </a:pPr>
                       <a:r>
@@ -2378,7 +2137,7 @@
                       </a:endParaRPr>
                     </a:p>
                   </a:txBody>
-                  <a:tcPr marL="91440" marR="91440" marT="45720" marB="45720" anchor="ctr">
+                  <a:tcPr anchor="ctr">
                     <a:lnL w="12700" cap="flat" cmpd="sng" algn="ctr">
                       <a:solidFill>
                         <a:srgbClr val="E2E8F0"/>
@@ -2425,7 +2184,7 @@
                     <a:bodyPr/>
                     <a:lstStyle/>
                     <a:p>
-                      <a:pPr algn="ctr" indent="0" marL="0">
+                      <a:pPr marL="0" indent="0" algn="ctr">
                         <a:buNone/>
                       </a:pPr>
                       <a:r>
@@ -2446,7 +2205,7 @@
                       </a:endParaRPr>
                     </a:p>
                   </a:txBody>
-                  <a:tcPr marL="91440" marR="91440" marT="45720" marB="45720" anchor="ctr">
+                  <a:tcPr anchor="ctr">
                     <a:lnL w="12700" cap="flat" cmpd="sng" algn="ctr">
                       <a:solidFill>
                         <a:srgbClr val="E2E8F0"/>
@@ -2493,7 +2252,7 @@
                     <a:bodyPr/>
                     <a:lstStyle/>
                     <a:p>
-                      <a:pPr algn="ctr" indent="0" marL="0">
+                      <a:pPr marL="0" indent="0" algn="ctr">
                         <a:buNone/>
                       </a:pPr>
                       <a:r>
@@ -2514,7 +2273,7 @@
                       </a:endParaRPr>
                     </a:p>
                   </a:txBody>
-                  <a:tcPr marL="91440" marR="91440" marT="45720" marB="45720" anchor="ctr">
+                  <a:tcPr anchor="ctr">
                     <a:lnL w="12700" cap="flat" cmpd="sng" algn="ctr">
                       <a:solidFill>
                         <a:srgbClr val="E2E8F0"/>
@@ -2556,6 +2315,11 @@
                     </a:solidFill>
                   </a:tcPr>
                 </a:tc>
+                <a:extLst>
+                  <a:ext uri="{0D108BD9-81ED-4DB2-BD59-A6C34878D82A}">
+                    <a16:rowId xmlns:a16="http://schemas.microsoft.com/office/drawing/2014/main" val="10000"/>
+                  </a:ext>
+                </a:extLst>
               </a:tr>
               <a:tr h="566928">
                 <a:tc>
@@ -2563,7 +2327,7 @@
                     <a:bodyPr/>
                     <a:lstStyle/>
                     <a:p>
-                      <a:pPr algn="l" indent="0" marL="0">
+                      <a:pPr marL="0" indent="0" algn="l">
                         <a:buNone/>
                       </a:pPr>
                       <a:r>
@@ -2584,7 +2348,7 @@
                       </a:endParaRPr>
                     </a:p>
                   </a:txBody>
-                  <a:tcPr marL="91440" marR="91440" marT="45720" marB="45720" anchor="ctr">
+                  <a:tcPr anchor="ctr">
                     <a:lnL w="12700" cap="flat" cmpd="sng" algn="ctr">
                       <a:solidFill>
                         <a:srgbClr val="E2E8F0"/>
@@ -2631,7 +2395,7 @@
                     <a:bodyPr/>
                     <a:lstStyle/>
                     <a:p>
-                      <a:pPr algn="ctr" indent="0" marL="0">
+                      <a:pPr marL="0" indent="0" algn="ctr">
                         <a:buNone/>
                       </a:pPr>
                       <a:r>
@@ -2652,7 +2416,7 @@
                       </a:endParaRPr>
                     </a:p>
                   </a:txBody>
-                  <a:tcPr marL="91440" marR="91440" marT="45720" marB="45720" anchor="ctr">
+                  <a:tcPr anchor="ctr">
                     <a:lnL w="12700" cap="flat" cmpd="sng" algn="ctr">
                       <a:solidFill>
                         <a:srgbClr val="E2E8F0"/>
@@ -2699,7 +2463,7 @@
                     <a:bodyPr/>
                     <a:lstStyle/>
                     <a:p>
-                      <a:pPr algn="ctr" indent="0" marL="0">
+                      <a:pPr marL="0" indent="0" algn="ctr">
                         <a:buNone/>
                       </a:pPr>
                       <a:r>
@@ -2720,7 +2484,7 @@
                       </a:endParaRPr>
                     </a:p>
                   </a:txBody>
-                  <a:tcPr marL="91440" marR="91440" marT="45720" marB="45720" anchor="ctr">
+                  <a:tcPr anchor="ctr">
                     <a:lnL w="12700" cap="flat" cmpd="sng" algn="ctr">
                       <a:solidFill>
                         <a:srgbClr val="E2E8F0"/>
@@ -2762,6 +2526,11 @@
                     </a:solidFill>
                   </a:tcPr>
                 </a:tc>
+                <a:extLst>
+                  <a:ext uri="{0D108BD9-81ED-4DB2-BD59-A6C34878D82A}">
+                    <a16:rowId xmlns:a16="http://schemas.microsoft.com/office/drawing/2014/main" val="10001"/>
+                  </a:ext>
+                </a:extLst>
               </a:tr>
               <a:tr h="566928">
                 <a:tc>
@@ -2769,7 +2538,7 @@
                     <a:bodyPr/>
                     <a:lstStyle/>
                     <a:p>
-                      <a:pPr algn="l" indent="0" marL="0">
+                      <a:pPr marL="0" indent="0" algn="l">
                         <a:buNone/>
                       </a:pPr>
                       <a:r>
@@ -2790,7 +2559,7 @@
                       </a:endParaRPr>
                     </a:p>
                   </a:txBody>
-                  <a:tcPr marL="91440" marR="91440" marT="45720" marB="45720" anchor="ctr">
+                  <a:tcPr anchor="ctr">
                     <a:lnL w="12700" cap="flat" cmpd="sng" algn="ctr">
                       <a:solidFill>
                         <a:srgbClr val="E2E8F0"/>
@@ -2837,7 +2606,7 @@
                     <a:bodyPr/>
                     <a:lstStyle/>
                     <a:p>
-                      <a:pPr algn="ctr" indent="0" marL="0">
+                      <a:pPr marL="0" indent="0" algn="ctr">
                         <a:buNone/>
                       </a:pPr>
                       <a:r>
@@ -2858,7 +2627,7 @@
                       </a:endParaRPr>
                     </a:p>
                   </a:txBody>
-                  <a:tcPr marL="91440" marR="91440" marT="45720" marB="45720" anchor="ctr">
+                  <a:tcPr anchor="ctr">
                     <a:lnL w="12700" cap="flat" cmpd="sng" algn="ctr">
                       <a:solidFill>
                         <a:srgbClr val="E2E8F0"/>
@@ -2905,7 +2674,7 @@
                     <a:bodyPr/>
                     <a:lstStyle/>
                     <a:p>
-                      <a:pPr algn="ctr" indent="0" marL="0">
+                      <a:pPr marL="0" indent="0" algn="ctr">
                         <a:buNone/>
                       </a:pPr>
                       <a:r>
@@ -2926,7 +2695,7 @@
                       </a:endParaRPr>
                     </a:p>
                   </a:txBody>
-                  <a:tcPr marL="91440" marR="91440" marT="45720" marB="45720" anchor="ctr">
+                  <a:tcPr anchor="ctr">
                     <a:lnL w="12700" cap="flat" cmpd="sng" algn="ctr">
                       <a:solidFill>
                         <a:srgbClr val="E2E8F0"/>
@@ -2968,6 +2737,11 @@
                     </a:solidFill>
                   </a:tcPr>
                 </a:tc>
+                <a:extLst>
+                  <a:ext uri="{0D108BD9-81ED-4DB2-BD59-A6C34878D82A}">
+                    <a16:rowId xmlns:a16="http://schemas.microsoft.com/office/drawing/2014/main" val="10002"/>
+                  </a:ext>
+                </a:extLst>
               </a:tr>
               <a:tr h="566928">
                 <a:tc>
@@ -2975,7 +2749,7 @@
                     <a:bodyPr/>
                     <a:lstStyle/>
                     <a:p>
-                      <a:pPr algn="l" indent="0" marL="0">
+                      <a:pPr marL="0" indent="0" algn="l">
                         <a:buNone/>
                       </a:pPr>
                       <a:r>
@@ -2996,7 +2770,7 @@
                       </a:endParaRPr>
                     </a:p>
                   </a:txBody>
-                  <a:tcPr marL="91440" marR="91440" marT="45720" marB="45720" anchor="ctr">
+                  <a:tcPr anchor="ctr">
                     <a:lnL w="12700" cap="flat" cmpd="sng" algn="ctr">
                       <a:solidFill>
                         <a:srgbClr val="E2E8F0"/>
@@ -3043,7 +2817,7 @@
                     <a:bodyPr/>
                     <a:lstStyle/>
                     <a:p>
-                      <a:pPr algn="ctr" indent="0" marL="0">
+                      <a:pPr marL="0" indent="0" algn="ctr">
                         <a:buNone/>
                       </a:pPr>
                       <a:r>
@@ -3064,7 +2838,7 @@
                       </a:endParaRPr>
                     </a:p>
                   </a:txBody>
-                  <a:tcPr marL="91440" marR="91440" marT="45720" marB="45720" anchor="ctr">
+                  <a:tcPr anchor="ctr">
                     <a:lnL w="12700" cap="flat" cmpd="sng" algn="ctr">
                       <a:solidFill>
                         <a:srgbClr val="E2E8F0"/>
@@ -3111,7 +2885,7 @@
                     <a:bodyPr/>
                     <a:lstStyle/>
                     <a:p>
-                      <a:pPr algn="ctr" indent="0" marL="0">
+                      <a:pPr marL="0" indent="0" algn="ctr">
                         <a:buNone/>
                       </a:pPr>
                       <a:r>
@@ -3132,7 +2906,7 @@
                       </a:endParaRPr>
                     </a:p>
                   </a:txBody>
-                  <a:tcPr marL="91440" marR="91440" marT="45720" marB="45720" anchor="ctr">
+                  <a:tcPr anchor="ctr">
                     <a:lnL w="12700" cap="flat" cmpd="sng" algn="ctr">
                       <a:solidFill>
                         <a:srgbClr val="E2E8F0"/>
@@ -3174,6 +2948,11 @@
                     </a:solidFill>
                   </a:tcPr>
                 </a:tc>
+                <a:extLst>
+                  <a:ext uri="{0D108BD9-81ED-4DB2-BD59-A6C34878D82A}">
+                    <a16:rowId xmlns:a16="http://schemas.microsoft.com/office/drawing/2014/main" val="10003"/>
+                  </a:ext>
+                </a:extLst>
               </a:tr>
               <a:tr h="566928">
                 <a:tc>
@@ -3181,7 +2960,7 @@
                     <a:bodyPr/>
                     <a:lstStyle/>
                     <a:p>
-                      <a:pPr algn="l" indent="0" marL="0">
+                      <a:pPr marL="0" indent="0" algn="l">
                         <a:buNone/>
                       </a:pPr>
                       <a:r>
@@ -3202,7 +2981,7 @@
                       </a:endParaRPr>
                     </a:p>
                   </a:txBody>
-                  <a:tcPr marL="91440" marR="91440" marT="45720" marB="45720" anchor="ctr">
+                  <a:tcPr anchor="ctr">
                     <a:lnL w="12700" cap="flat" cmpd="sng" algn="ctr">
                       <a:solidFill>
                         <a:srgbClr val="E2E8F0"/>
@@ -3249,7 +3028,7 @@
                     <a:bodyPr/>
                     <a:lstStyle/>
                     <a:p>
-                      <a:pPr algn="ctr" indent="0" marL="0">
+                      <a:pPr marL="0" indent="0" algn="ctr">
                         <a:buNone/>
                       </a:pPr>
                       <a:r>
@@ -3270,7 +3049,7 @@
                       </a:endParaRPr>
                     </a:p>
                   </a:txBody>
-                  <a:tcPr marL="91440" marR="91440" marT="45720" marB="45720" anchor="ctr">
+                  <a:tcPr anchor="ctr">
                     <a:lnL w="12700" cap="flat" cmpd="sng" algn="ctr">
                       <a:solidFill>
                         <a:srgbClr val="E2E8F0"/>
@@ -3317,7 +3096,7 @@
                     <a:bodyPr/>
                     <a:lstStyle/>
                     <a:p>
-                      <a:pPr algn="ctr" indent="0" marL="0">
+                      <a:pPr marL="0" indent="0" algn="ctr">
                         <a:buNone/>
                       </a:pPr>
                       <a:r>
@@ -3338,7 +3117,7 @@
                       </a:endParaRPr>
                     </a:p>
                   </a:txBody>
-                  <a:tcPr marL="91440" marR="91440" marT="45720" marB="45720" anchor="ctr">
+                  <a:tcPr anchor="ctr">
                     <a:lnL w="12700" cap="flat" cmpd="sng" algn="ctr">
                       <a:solidFill>
                         <a:srgbClr val="E2E8F0"/>
@@ -3380,6 +3159,11 @@
                     </a:solidFill>
                   </a:tcPr>
                 </a:tc>
+                <a:extLst>
+                  <a:ext uri="{0D108BD9-81ED-4DB2-BD59-A6C34878D82A}">
+                    <a16:rowId xmlns:a16="http://schemas.microsoft.com/office/drawing/2014/main" val="10004"/>
+                  </a:ext>
+                </a:extLst>
               </a:tr>
               <a:tr h="566928">
                 <a:tc>
@@ -3387,7 +3171,7 @@
                     <a:bodyPr/>
                     <a:lstStyle/>
                     <a:p>
-                      <a:pPr algn="l" indent="0" marL="0">
+                      <a:pPr marL="0" indent="0" algn="l">
                         <a:buNone/>
                       </a:pPr>
                       <a:r>
@@ -3408,7 +3192,7 @@
                       </a:endParaRPr>
                     </a:p>
                   </a:txBody>
-                  <a:tcPr marL="91440" marR="91440" marT="45720" marB="45720" anchor="ctr">
+                  <a:tcPr anchor="ctr">
                     <a:lnL w="12700" cap="flat" cmpd="sng" algn="ctr">
                       <a:solidFill>
                         <a:srgbClr val="E2E8F0"/>
@@ -3455,7 +3239,7 @@
                     <a:bodyPr/>
                     <a:lstStyle/>
                     <a:p>
-                      <a:pPr algn="ctr" indent="0" marL="0">
+                      <a:pPr marL="0" indent="0" algn="ctr">
                         <a:buNone/>
                       </a:pPr>
                       <a:r>
@@ -3476,7 +3260,7 @@
                       </a:endParaRPr>
                     </a:p>
                   </a:txBody>
-                  <a:tcPr marL="91440" marR="91440" marT="45720" marB="45720" anchor="ctr">
+                  <a:tcPr anchor="ctr">
                     <a:lnL w="12700" cap="flat" cmpd="sng" algn="ctr">
                       <a:solidFill>
                         <a:srgbClr val="E2E8F0"/>
@@ -3523,7 +3307,7 @@
                     <a:bodyPr/>
                     <a:lstStyle/>
                     <a:p>
-                      <a:pPr algn="ctr" indent="0" marL="0">
+                      <a:pPr marL="0" indent="0" algn="ctr">
                         <a:buNone/>
                       </a:pPr>
                       <a:r>
@@ -3544,7 +3328,7 @@
                       </a:endParaRPr>
                     </a:p>
                   </a:txBody>
-                  <a:tcPr marL="91440" marR="91440" marT="45720" marB="45720" anchor="ctr">
+                  <a:tcPr anchor="ctr">
                     <a:lnL w="12700" cap="flat" cmpd="sng" algn="ctr">
                       <a:solidFill>
                         <a:srgbClr val="E2E8F0"/>
@@ -3586,6 +3370,11 @@
                     </a:solidFill>
                   </a:tcPr>
                 </a:tc>
+                <a:extLst>
+                  <a:ext uri="{0D108BD9-81ED-4DB2-BD59-A6C34878D82A}">
+                    <a16:rowId xmlns:a16="http://schemas.microsoft.com/office/drawing/2014/main" val="10005"/>
+                  </a:ext>
+                </a:extLst>
               </a:tr>
               <a:tr h="566928">
                 <a:tc>
@@ -3593,7 +3382,7 @@
                     <a:bodyPr/>
                     <a:lstStyle/>
                     <a:p>
-                      <a:pPr algn="l" indent="0" marL="0">
+                      <a:pPr marL="0" indent="0" algn="l">
                         <a:buNone/>
                       </a:pPr>
                       <a:r>
@@ -3614,7 +3403,7 @@
                       </a:endParaRPr>
                     </a:p>
                   </a:txBody>
-                  <a:tcPr marL="91440" marR="91440" marT="45720" marB="45720" anchor="ctr">
+                  <a:tcPr anchor="ctr">
                     <a:lnL w="12700" cap="flat" cmpd="sng" algn="ctr">
                       <a:solidFill>
                         <a:srgbClr val="E2E8F0"/>
@@ -3661,7 +3450,7 @@
                     <a:bodyPr/>
                     <a:lstStyle/>
                     <a:p>
-                      <a:pPr algn="ctr" indent="0" marL="0">
+                      <a:pPr marL="0" indent="0" algn="ctr">
                         <a:buNone/>
                       </a:pPr>
                       <a:r>
@@ -3682,7 +3471,7 @@
                       </a:endParaRPr>
                     </a:p>
                   </a:txBody>
-                  <a:tcPr marL="91440" marR="91440" marT="45720" marB="45720" anchor="ctr">
+                  <a:tcPr anchor="ctr">
                     <a:lnL w="12700" cap="flat" cmpd="sng" algn="ctr">
                       <a:solidFill>
                         <a:srgbClr val="E2E8F0"/>
@@ -3729,7 +3518,7 @@
                     <a:bodyPr/>
                     <a:lstStyle/>
                     <a:p>
-                      <a:pPr algn="ctr" indent="0" marL="0">
+                      <a:pPr marL="0" indent="0" algn="ctr">
                         <a:buNone/>
                       </a:pPr>
                       <a:r>
@@ -3750,7 +3539,7 @@
                       </a:endParaRPr>
                     </a:p>
                   </a:txBody>
-                  <a:tcPr marL="91440" marR="91440" marT="45720" marB="45720" anchor="ctr">
+                  <a:tcPr anchor="ctr">
                     <a:lnL w="12700" cap="flat" cmpd="sng" algn="ctr">
                       <a:solidFill>
                         <a:srgbClr val="E2E8F0"/>
@@ -3792,6 +3581,11 @@
                     </a:solidFill>
                   </a:tcPr>
                 </a:tc>
+                <a:extLst>
+                  <a:ext uri="{0D108BD9-81ED-4DB2-BD59-A6C34878D82A}">
+                    <a16:rowId xmlns:a16="http://schemas.microsoft.com/office/drawing/2014/main" val="10006"/>
+                  </a:ext>
+                </a:extLst>
               </a:tr>
             </a:tbl>
           </a:graphicData>
@@ -3818,7 +3612,7 @@
           <a:bodyPr wrap="square" rtlCol="0" anchor="ctr"/>
           <a:lstStyle/>
           <a:p>
-            <a:pPr indent="0" marL="0">
+            <a:pPr marL="0" indent="0">
               <a:buNone/>
             </a:pPr>
             <a:r>
@@ -3857,7 +3651,7 @@
           <a:bodyPr wrap="square" rtlCol="0" anchor="ctr"/>
           <a:lstStyle/>
           <a:p>
-            <a:pPr indent="0" marL="0">
+            <a:pPr marL="0" indent="0">
               <a:buNone/>
             </a:pPr>
             <a:r>
@@ -3896,7 +3690,7 @@
           <a:bodyPr wrap="square" rtlCol="0" anchor="ctr"/>
           <a:lstStyle/>
           <a:p>
-            <a:pPr algn="r" indent="0" marL="0">
+            <a:pPr marL="0" indent="0" algn="r">
               <a:buNone/>
             </a:pPr>
             <a:r>
@@ -3930,6 +3724,7 @@
         <a:solidFill>
           <a:srgbClr val="0F172A"/>
         </a:solidFill>
+        <a:effectLst/>
       </p:bgPr>
     </p:bg>
     <p:spTree>
@@ -3989,7 +3784,7 @@
           <a:bodyPr wrap="square" rtlCol="0" anchor="ctr"/>
           <a:lstStyle/>
           <a:p>
-            <a:pPr indent="0" marL="0">
+            <a:pPr marL="0" indent="0">
               <a:buNone/>
             </a:pPr>
             <a:r>
@@ -4028,7 +3823,7 @@
           <a:bodyPr wrap="square" rtlCol="0" anchor="ctr"/>
           <a:lstStyle/>
           <a:p>
-            <a:pPr indent="0" marL="0">
+            <a:pPr marL="0" indent="0">
               <a:buNone/>
             </a:pPr>
             <a:r>
@@ -4094,7 +3889,7 @@
           <a:bodyPr wrap="square" rtlCol="0" anchor="ctr"/>
           <a:lstStyle/>
           <a:p>
-            <a:pPr indent="0" marL="0">
+            <a:pPr marL="0" indent="0">
               <a:buNone/>
             </a:pPr>
             <a:r>
@@ -4133,7 +3928,7 @@
           <a:bodyPr wrap="square" rtlCol="0" anchor="ctr"/>
           <a:lstStyle/>
           <a:p>
-            <a:pPr indent="0" marL="0">
+            <a:pPr marL="0" indent="0">
               <a:buNone/>
             </a:pPr>
             <a:r>
@@ -4172,7 +3967,7 @@
           <a:bodyPr wrap="square" rtlCol="0" anchor="ctr"/>
           <a:lstStyle/>
           <a:p>
-            <a:pPr indent="0" marL="0">
+            <a:pPr marL="0" indent="0">
               <a:buNone/>
             </a:pPr>
             <a:r>
@@ -4211,7 +4006,7 @@
           <a:bodyPr wrap="square" rtlCol="0" anchor="ctr"/>
           <a:lstStyle/>
           <a:p>
-            <a:pPr indent="0" marL="0">
+            <a:pPr marL="0" indent="0">
               <a:buNone/>
             </a:pPr>
             <a:r>
@@ -4250,7 +4045,7 @@
           <a:bodyPr wrap="square" rtlCol="0" anchor="ctr"/>
           <a:lstStyle/>
           <a:p>
-            <a:pPr indent="0" marL="0">
+            <a:pPr marL="0" indent="0">
               <a:buNone/>
             </a:pPr>
             <a:r>
@@ -4289,7 +4084,7 @@
           <a:bodyPr wrap="square" rtlCol="0" anchor="ctr"/>
           <a:lstStyle/>
           <a:p>
-            <a:pPr indent="0" marL="0">
+            <a:pPr marL="0" indent="0">
               <a:buNone/>
             </a:pPr>
             <a:r>
@@ -4328,7 +4123,7 @@
           <a:bodyPr wrap="square" rtlCol="0" anchor="ctr"/>
           <a:lstStyle/>
           <a:p>
-            <a:pPr indent="0" marL="0">
+            <a:pPr marL="0" indent="0">
               <a:buNone/>
             </a:pPr>
             <a:r>
@@ -4367,7 +4162,7 @@
           <a:bodyPr wrap="square" rtlCol="0" anchor="ctr"/>
           <a:lstStyle/>
           <a:p>
-            <a:pPr indent="0" marL="0">
+            <a:pPr marL="0" indent="0">
               <a:buNone/>
             </a:pPr>
             <a:r>
@@ -4381,9 +4176,6 @@
               </a:rPr>
               <a:t>SWING CORTEX</a:t>
             </a:r>
-            <a:pPr indent="0" marL="0">
-              <a:buNone/>
-            </a:pPr>
             <a:r>
               <a:rPr lang="en-US" sz="1600" dirty="0">
                 <a:solidFill>
@@ -4415,6 +4207,7 @@
         <a:solidFill>
           <a:srgbClr val="FFFFFF"/>
         </a:solidFill>
+        <a:effectLst/>
       </p:bgPr>
     </p:bg>
     <p:spTree>
@@ -4452,11 +4245,11 @@
           <a:bodyPr wrap="square" rtlCol="0" anchor="ctr"/>
           <a:lstStyle/>
           <a:p>
-            <a:pPr indent="0" marL="0">
-              <a:buNone/>
-            </a:pPr>
-            <a:r>
-              <a:rPr lang="en-US" sz="1100" b="1" spc="200" kern="0" dirty="0">
+            <a:pPr marL="0" indent="0">
+              <a:buNone/>
+            </a:pPr>
+            <a:r>
+              <a:rPr lang="en-US" sz="1100" b="1" kern="0" spc="200" dirty="0">
                 <a:solidFill>
                   <a:srgbClr val="0D9488"/>
                 </a:solidFill>
@@ -4491,7 +4284,7 @@
           <a:bodyPr wrap="square" rtlCol="0" anchor="ctr"/>
           <a:lstStyle/>
           <a:p>
-            <a:pPr indent="0" marL="0">
+            <a:pPr marL="0" indent="0">
               <a:buNone/>
             </a:pPr>
             <a:r>
@@ -4530,7 +4323,7 @@
           <a:bodyPr wrap="square" rtlCol="0" anchor="ctr"/>
           <a:lstStyle/>
           <a:p>
-            <a:pPr indent="0" marL="0">
+            <a:pPr marL="0" indent="0">
               <a:buNone/>
             </a:pPr>
             <a:r>
@@ -4618,7 +4411,7 @@
           <a:bodyPr wrap="square" rtlCol="0" anchor="ctr"/>
           <a:lstStyle/>
           <a:p>
-            <a:pPr algn="ctr" indent="0" marL="0">
+            <a:pPr marL="0" indent="0" algn="ctr">
               <a:buNone/>
             </a:pPr>
             <a:r>
@@ -4657,7 +4450,7 @@
           <a:bodyPr wrap="square" rtlCol="0" anchor="ctr"/>
           <a:lstStyle/>
           <a:p>
-            <a:pPr indent="0" marL="0">
+            <a:pPr marL="0" indent="0">
               <a:buNone/>
             </a:pPr>
             <a:r>
@@ -4696,7 +4489,7 @@
           <a:bodyPr wrap="square" rtlCol="0" anchor="ctr"/>
           <a:lstStyle/>
           <a:p>
-            <a:pPr indent="0" marL="0">
+            <a:pPr marL="0" indent="0">
               <a:buNone/>
             </a:pPr>
             <a:r>
@@ -4784,7 +4577,7 @@
           <a:bodyPr wrap="square" rtlCol="0" anchor="ctr"/>
           <a:lstStyle/>
           <a:p>
-            <a:pPr algn="ctr" indent="0" marL="0">
+            <a:pPr marL="0" indent="0" algn="ctr">
               <a:buNone/>
             </a:pPr>
             <a:r>
@@ -4823,7 +4616,7 @@
           <a:bodyPr wrap="square" rtlCol="0" anchor="ctr"/>
           <a:lstStyle/>
           <a:p>
-            <a:pPr indent="0" marL="0">
+            <a:pPr marL="0" indent="0">
               <a:buNone/>
             </a:pPr>
             <a:r>
@@ -4862,7 +4655,7 @@
           <a:bodyPr wrap="square" rtlCol="0" anchor="ctr"/>
           <a:lstStyle/>
           <a:p>
-            <a:pPr indent="0" marL="0">
+            <a:pPr marL="0" indent="0">
               <a:buNone/>
             </a:pPr>
             <a:r>
@@ -4950,7 +4743,7 @@
           <a:bodyPr wrap="square" rtlCol="0" anchor="ctr"/>
           <a:lstStyle/>
           <a:p>
-            <a:pPr algn="ctr" indent="0" marL="0">
+            <a:pPr marL="0" indent="0" algn="ctr">
               <a:buNone/>
             </a:pPr>
             <a:r>
@@ -4989,7 +4782,7 @@
           <a:bodyPr wrap="square" rtlCol="0" anchor="ctr"/>
           <a:lstStyle/>
           <a:p>
-            <a:pPr indent="0" marL="0">
+            <a:pPr marL="0" indent="0">
               <a:buNone/>
             </a:pPr>
             <a:r>
@@ -5028,7 +4821,7 @@
           <a:bodyPr wrap="square" rtlCol="0" anchor="ctr"/>
           <a:lstStyle/>
           <a:p>
-            <a:pPr indent="0" marL="0">
+            <a:pPr marL="0" indent="0">
               <a:buNone/>
             </a:pPr>
             <a:r>
@@ -5067,7 +4860,7 @@
           <a:bodyPr wrap="square" rtlCol="0" anchor="ctr"/>
           <a:lstStyle/>
           <a:p>
-            <a:pPr indent="0" marL="0">
+            <a:pPr marL="0" indent="0">
               <a:buNone/>
             </a:pPr>
             <a:r>
@@ -5106,7 +4899,7 @@
           <a:bodyPr wrap="square" rtlCol="0" anchor="ctr"/>
           <a:lstStyle/>
           <a:p>
-            <a:pPr algn="r" indent="0" marL="0">
+            <a:pPr marL="0" indent="0" algn="r">
               <a:buNone/>
             </a:pPr>
             <a:r>
@@ -5140,6 +4933,7 @@
         <a:solidFill>
           <a:srgbClr val="FFFFFF"/>
         </a:solidFill>
+        <a:effectLst/>
       </p:bgPr>
     </p:bg>
     <p:spTree>
@@ -5177,11 +4971,11 @@
           <a:bodyPr wrap="square" rtlCol="0" anchor="ctr"/>
           <a:lstStyle/>
           <a:p>
-            <a:pPr indent="0" marL="0">
-              <a:buNone/>
-            </a:pPr>
-            <a:r>
-              <a:rPr lang="en-US" sz="1100" b="1" spc="200" kern="0" dirty="0">
+            <a:pPr marL="0" indent="0">
+              <a:buNone/>
+            </a:pPr>
+            <a:r>
+              <a:rPr lang="en-US" sz="1100" b="1" kern="0" spc="200" dirty="0">
                 <a:solidFill>
                   <a:srgbClr val="0D9488"/>
                 </a:solidFill>
@@ -5216,7 +5010,7 @@
           <a:bodyPr wrap="square" rtlCol="0" anchor="ctr"/>
           <a:lstStyle/>
           <a:p>
-            <a:pPr indent="0" marL="0">
+            <a:pPr marL="0" indent="0">
               <a:buNone/>
             </a:pPr>
             <a:r>
@@ -5260,7 +5054,7 @@
             <a:prstDash val="solid"/>
           </a:ln>
           <a:effectLst>
-            <a:outerShdw sx="100000" sy="100000" kx="0" ky="0" algn="bl" rotWithShape="0" blurRad="76200" dist="25400" dir="5400000">
+            <a:outerShdw blurRad="76200" dist="25400" dir="5400000" algn="bl" rotWithShape="0">
               <a:srgbClr val="94A3B8">
                 <a:alpha val="30000"/>
               </a:srgbClr>
@@ -5311,7 +5105,7 @@
           <a:bodyPr wrap="square" rtlCol="0" anchor="ctr"/>
           <a:lstStyle/>
           <a:p>
-            <a:pPr algn="ctr" indent="0" marL="0">
+            <a:pPr marL="0" indent="0" algn="ctr">
               <a:buNone/>
             </a:pPr>
             <a:r>
@@ -5350,7 +5144,7 @@
           <a:bodyPr wrap="square" rtlCol="0" anchor="ctr"/>
           <a:lstStyle/>
           <a:p>
-            <a:pPr indent="0" marL="0">
+            <a:pPr marL="0" indent="0">
               <a:buNone/>
             </a:pPr>
             <a:r>
@@ -5389,7 +5183,7 @@
           <a:bodyPr wrap="square" rtlCol="0" anchor="ctr"/>
           <a:lstStyle/>
           <a:p>
-            <a:pPr indent="0" marL="0">
+            <a:pPr marL="0" indent="0">
               <a:lnSpc>
                 <a:spcPct val="135000"/>
               </a:lnSpc>
@@ -5436,7 +5230,7 @@
             <a:prstDash val="solid"/>
           </a:ln>
           <a:effectLst>
-            <a:outerShdw sx="100000" sy="100000" kx="0" ky="0" algn="bl" rotWithShape="0" blurRad="76200" dist="25400" dir="5400000">
+            <a:outerShdw blurRad="76200" dist="25400" dir="5400000" algn="bl" rotWithShape="0">
               <a:srgbClr val="94A3B8">
                 <a:alpha val="30000"/>
               </a:srgbClr>
@@ -5487,7 +5281,7 @@
           <a:bodyPr wrap="square" rtlCol="0" anchor="ctr"/>
           <a:lstStyle/>
           <a:p>
-            <a:pPr algn="ctr" indent="0" marL="0">
+            <a:pPr marL="0" indent="0" algn="ctr">
               <a:buNone/>
             </a:pPr>
             <a:r>
@@ -5526,7 +5320,7 @@
           <a:bodyPr wrap="square" rtlCol="0" anchor="ctr"/>
           <a:lstStyle/>
           <a:p>
-            <a:pPr indent="0" marL="0">
+            <a:pPr marL="0" indent="0">
               <a:buNone/>
             </a:pPr>
             <a:r>
@@ -5565,7 +5359,7 @@
           <a:bodyPr wrap="square" rtlCol="0" anchor="ctr"/>
           <a:lstStyle/>
           <a:p>
-            <a:pPr indent="0" marL="0">
+            <a:pPr marL="0" indent="0">
               <a:lnSpc>
                 <a:spcPct val="135000"/>
               </a:lnSpc>
@@ -5612,7 +5406,7 @@
             <a:prstDash val="solid"/>
           </a:ln>
           <a:effectLst>
-            <a:outerShdw sx="100000" sy="100000" kx="0" ky="0" algn="bl" rotWithShape="0" blurRad="76200" dist="25400" dir="5400000">
+            <a:outerShdw blurRad="76200" dist="25400" dir="5400000" algn="bl" rotWithShape="0">
               <a:srgbClr val="94A3B8">
                 <a:alpha val="30000"/>
               </a:srgbClr>
@@ -5663,7 +5457,7 @@
           <a:bodyPr wrap="square" rtlCol="0" anchor="ctr"/>
           <a:lstStyle/>
           <a:p>
-            <a:pPr algn="ctr" indent="0" marL="0">
+            <a:pPr marL="0" indent="0" algn="ctr">
               <a:buNone/>
             </a:pPr>
             <a:r>
@@ -5702,7 +5496,7 @@
           <a:bodyPr wrap="square" rtlCol="0" anchor="ctr"/>
           <a:lstStyle/>
           <a:p>
-            <a:pPr indent="0" marL="0">
+            <a:pPr marL="0" indent="0">
               <a:buNone/>
             </a:pPr>
             <a:r>
@@ -5741,7 +5535,7 @@
           <a:bodyPr wrap="square" rtlCol="0" anchor="ctr"/>
           <a:lstStyle/>
           <a:p>
-            <a:pPr indent="0" marL="0">
+            <a:pPr marL="0" indent="0">
               <a:lnSpc>
                 <a:spcPct val="135000"/>
               </a:lnSpc>
@@ -5783,7 +5577,7 @@
           <a:bodyPr wrap="square" rtlCol="0" anchor="ctr"/>
           <a:lstStyle/>
           <a:p>
-            <a:pPr indent="0" marL="0">
+            <a:pPr marL="0" indent="0">
               <a:buNone/>
             </a:pPr>
             <a:r>
@@ -5822,7 +5616,7 @@
           <a:bodyPr wrap="square" rtlCol="0" anchor="ctr"/>
           <a:lstStyle/>
           <a:p>
-            <a:pPr algn="r" indent="0" marL="0">
+            <a:pPr marL="0" indent="0" algn="r">
               <a:buNone/>
             </a:pPr>
             <a:r>
@@ -5856,6 +5650,7 @@
         <a:solidFill>
           <a:srgbClr val="FFFFFF"/>
         </a:solidFill>
+        <a:effectLst/>
       </p:bgPr>
     </p:bg>
     <p:spTree>
@@ -5893,11 +5688,11 @@
           <a:bodyPr wrap="square" rtlCol="0" anchor="ctr"/>
           <a:lstStyle/>
           <a:p>
-            <a:pPr indent="0" marL="0">
-              <a:buNone/>
-            </a:pPr>
-            <a:r>
-              <a:rPr lang="en-US" sz="1100" b="1" spc="200" kern="0" dirty="0">
+            <a:pPr marL="0" indent="0">
+              <a:buNone/>
+            </a:pPr>
+            <a:r>
+              <a:rPr lang="en-US" sz="1100" b="1" kern="0" spc="200" dirty="0">
                 <a:solidFill>
                   <a:srgbClr val="0D9488"/>
                 </a:solidFill>
@@ -5932,7 +5727,7 @@
           <a:bodyPr wrap="square" rtlCol="0" anchor="ctr"/>
           <a:lstStyle/>
           <a:p>
-            <a:pPr indent="0" marL="0">
+            <a:pPr marL="0" indent="0">
               <a:buNone/>
             </a:pPr>
             <a:r>
@@ -5971,7 +5766,7 @@
           <a:bodyPr wrap="square" rtlCol="0" anchor="ctr"/>
           <a:lstStyle/>
           <a:p>
-            <a:pPr indent="0" marL="0">
+            <a:pPr marL="0" indent="0">
               <a:lnSpc>
                 <a:spcPct val="130000"/>
               </a:lnSpc>
@@ -6040,7 +5835,7 @@
           <a:bodyPr wrap="square" rtlCol="0" anchor="ctr"/>
           <a:lstStyle/>
           <a:p>
-            <a:pPr indent="0" marL="0">
+            <a:pPr marL="0" indent="0">
               <a:buNone/>
             </a:pPr>
             <a:r>
@@ -6079,7 +5874,7 @@
           <a:bodyPr wrap="square" rtlCol="0" anchor="ctr"/>
           <a:lstStyle/>
           <a:p>
-            <a:pPr indent="0" marL="0">
+            <a:pPr marL="0" indent="0">
               <a:lnSpc>
                 <a:spcPct val="130000"/>
               </a:lnSpc>
@@ -6148,7 +5943,7 @@
           <a:bodyPr wrap="square" rtlCol="0" anchor="ctr"/>
           <a:lstStyle/>
           <a:p>
-            <a:pPr indent="0" marL="0">
+            <a:pPr marL="0" indent="0">
               <a:buNone/>
             </a:pPr>
             <a:r>
@@ -6187,7 +5982,7 @@
           <a:bodyPr wrap="square" rtlCol="0" anchor="ctr"/>
           <a:lstStyle/>
           <a:p>
-            <a:pPr indent="0" marL="0">
+            <a:pPr marL="0" indent="0">
               <a:lnSpc>
                 <a:spcPct val="130000"/>
               </a:lnSpc>
@@ -6204,12 +5999,6 @@
               </a:rPr>
               <a:t>御社が積み上げた </a:t>
             </a:r>
-            <a:pPr indent="0" marL="0">
-              <a:lnSpc>
-                <a:spcPct val="130000"/>
-              </a:lnSpc>
-              <a:buNone/>
-            </a:pPr>
             <a:r>
               <a:rPr lang="en-US" sz="1300" b="1" dirty="0">
                 <a:solidFill>
@@ -6221,12 +6010,6 @@
               </a:rPr>
               <a:t>メソッド・語彙・ドリルの体系</a:t>
             </a:r>
-            <a:pPr indent="0" marL="0">
-              <a:lnSpc>
-                <a:spcPct val="130000"/>
-              </a:lnSpc>
-              <a:buNone/>
-            </a:pPr>
             <a:r>
               <a:rPr lang="en-US" sz="1300" dirty="0">
                 <a:solidFill>
@@ -6263,7 +6046,7 @@
           <a:bodyPr wrap="square" rtlCol="0" anchor="ctr"/>
           <a:lstStyle/>
           <a:p>
-            <a:pPr indent="0" marL="0">
+            <a:pPr marL="0" indent="0">
               <a:buNone/>
             </a:pPr>
             <a:r>
@@ -6329,7 +6112,7 @@
           <a:bodyPr wrap="square" rtlCol="0" anchor="ctr"/>
           <a:lstStyle/>
           <a:p>
-            <a:pPr algn="ctr" indent="0" marL="0">
+            <a:pPr marL="0" indent="0" algn="ctr">
               <a:buNone/>
             </a:pPr>
             <a:r>
@@ -6395,7 +6178,7 @@
           <a:bodyPr wrap="square" rtlCol="0" anchor="ctr"/>
           <a:lstStyle/>
           <a:p>
-            <a:pPr algn="ctr" indent="0" marL="0">
+            <a:pPr marL="0" indent="0" algn="ctr">
               <a:buNone/>
             </a:pPr>
             <a:r>
@@ -6461,7 +6244,7 @@
           <a:bodyPr wrap="square" rtlCol="0" anchor="ctr"/>
           <a:lstStyle/>
           <a:p>
-            <a:pPr algn="ctr" indent="0" marL="0">
+            <a:pPr marL="0" indent="0" algn="ctr">
               <a:buNone/>
             </a:pPr>
             <a:r>
@@ -6527,7 +6310,7 @@
           <a:bodyPr wrap="square" rtlCol="0" anchor="ctr"/>
           <a:lstStyle/>
           <a:p>
-            <a:pPr algn="ctr" indent="0" marL="0">
+            <a:pPr marL="0" indent="0" algn="ctr">
               <a:buNone/>
             </a:pPr>
             <a:r>
@@ -6593,7 +6376,7 @@
           <a:bodyPr wrap="square" rtlCol="0" anchor="ctr"/>
           <a:lstStyle/>
           <a:p>
-            <a:pPr algn="ctr" indent="0" marL="0">
+            <a:pPr marL="0" indent="0" algn="ctr">
               <a:buNone/>
             </a:pPr>
             <a:r>
@@ -6659,7 +6442,7 @@
           <a:bodyPr wrap="square" rtlCol="0" anchor="ctr"/>
           <a:lstStyle/>
           <a:p>
-            <a:pPr algn="ctr" indent="0" marL="0">
+            <a:pPr marL="0" indent="0" algn="ctr">
               <a:buNone/>
             </a:pPr>
             <a:r>
@@ -6725,7 +6508,7 @@
           <a:bodyPr wrap="square" rtlCol="0" anchor="ctr"/>
           <a:lstStyle/>
           <a:p>
-            <a:pPr algn="ctr" indent="0" marL="0">
+            <a:pPr marL="0" indent="0" algn="ctr">
               <a:buNone/>
             </a:pPr>
             <a:r>
@@ -6791,7 +6574,7 @@
           <a:bodyPr wrap="square" rtlCol="0" anchor="ctr"/>
           <a:lstStyle/>
           <a:p>
-            <a:pPr algn="ctr" indent="0" marL="0">
+            <a:pPr marL="0" indent="0" algn="ctr">
               <a:buNone/>
             </a:pPr>
             <a:r>
@@ -6830,7 +6613,7 @@
           <a:bodyPr wrap="square" rtlCol="0" anchor="ctr"/>
           <a:lstStyle/>
           <a:p>
-            <a:pPr algn="ctr" indent="0" marL="0">
+            <a:pPr marL="0" indent="0" algn="ctr">
               <a:buNone/>
             </a:pPr>
             <a:r>
@@ -6844,9 +6627,6 @@
               </a:rPr>
               <a:t>実績：</a:t>
             </a:r>
-            <a:pPr algn="ctr" indent="0" marL="0">
-              <a:buNone/>
-            </a:pPr>
             <a:r>
               <a:rPr lang="en-US" sz="1300" dirty="0">
                 <a:solidFill>
@@ -6883,7 +6663,7 @@
           <a:bodyPr wrap="square" rtlCol="0" anchor="ctr"/>
           <a:lstStyle/>
           <a:p>
-            <a:pPr indent="0" marL="0">
+            <a:pPr marL="0" indent="0">
               <a:buNone/>
             </a:pPr>
             <a:r>
@@ -6922,7 +6702,7 @@
           <a:bodyPr wrap="square" rtlCol="0" anchor="ctr"/>
           <a:lstStyle/>
           <a:p>
-            <a:pPr algn="r" indent="0" marL="0">
+            <a:pPr marL="0" indent="0" algn="r">
               <a:buNone/>
             </a:pPr>
             <a:r>
@@ -6956,6 +6736,7 @@
         <a:solidFill>
           <a:srgbClr val="FFFFFF"/>
         </a:solidFill>
+        <a:effectLst/>
       </p:bgPr>
     </p:bg>
     <p:spTree>
@@ -6993,11 +6774,11 @@
           <a:bodyPr wrap="square" rtlCol="0" anchor="ctr"/>
           <a:lstStyle/>
           <a:p>
-            <a:pPr indent="0" marL="0">
-              <a:buNone/>
-            </a:pPr>
-            <a:r>
-              <a:rPr lang="en-US" sz="1100" b="1" spc="200" kern="0" dirty="0">
+            <a:pPr marL="0" indent="0">
+              <a:buNone/>
+            </a:pPr>
+            <a:r>
+              <a:rPr lang="en-US" sz="1100" b="1" kern="0" spc="200" dirty="0">
                 <a:solidFill>
                   <a:srgbClr val="0D9488"/>
                 </a:solidFill>
@@ -7032,7 +6813,7 @@
           <a:bodyPr wrap="square" rtlCol="0" anchor="ctr"/>
           <a:lstStyle/>
           <a:p>
-            <a:pPr indent="0" marL="0">
+            <a:pPr marL="0" indent="0">
               <a:buNone/>
             </a:pPr>
             <a:r>
@@ -7076,7 +6857,7 @@
             <a:prstDash val="solid"/>
           </a:ln>
           <a:effectLst>
-            <a:outerShdw sx="100000" sy="100000" kx="0" ky="0" algn="bl" rotWithShape="0" blurRad="76200" dist="25400" dir="5400000">
+            <a:outerShdw blurRad="76200" dist="25400" dir="5400000" algn="bl" rotWithShape="0">
               <a:srgbClr val="94A3B8">
                 <a:alpha val="30000"/>
               </a:srgbClr>
@@ -7127,7 +6908,7 @@
           <a:bodyPr wrap="square" rtlCol="0" anchor="ctr"/>
           <a:lstStyle/>
           <a:p>
-            <a:pPr algn="ctr" indent="0" marL="0">
+            <a:pPr marL="0" indent="0" algn="ctr">
               <a:buNone/>
             </a:pPr>
             <a:r>
@@ -7166,7 +6947,7 @@
           <a:bodyPr wrap="square" rtlCol="0" anchor="ctr"/>
           <a:lstStyle/>
           <a:p>
-            <a:pPr indent="0" marL="0">
+            <a:pPr marL="0" indent="0">
               <a:buNone/>
             </a:pPr>
             <a:r>
@@ -7205,7 +6986,7 @@
           <a:bodyPr wrap="square" rtlCol="0" anchor="ctr"/>
           <a:lstStyle/>
           <a:p>
-            <a:pPr indent="0" marL="0">
+            <a:pPr marL="0" indent="0">
               <a:lnSpc>
                 <a:spcPct val="125000"/>
               </a:lnSpc>
@@ -7252,7 +7033,7 @@
             <a:prstDash val="solid"/>
           </a:ln>
           <a:effectLst>
-            <a:outerShdw sx="100000" sy="100000" kx="0" ky="0" algn="bl" rotWithShape="0" blurRad="76200" dist="25400" dir="5400000">
+            <a:outerShdw blurRad="76200" dist="25400" dir="5400000" algn="bl" rotWithShape="0">
               <a:srgbClr val="94A3B8">
                 <a:alpha val="30000"/>
               </a:srgbClr>
@@ -7303,7 +7084,7 @@
           <a:bodyPr wrap="square" rtlCol="0" anchor="ctr"/>
           <a:lstStyle/>
           <a:p>
-            <a:pPr algn="ctr" indent="0" marL="0">
+            <a:pPr marL="0" indent="0" algn="ctr">
               <a:buNone/>
             </a:pPr>
             <a:r>
@@ -7342,7 +7123,7 @@
           <a:bodyPr wrap="square" rtlCol="0" anchor="ctr"/>
           <a:lstStyle/>
           <a:p>
-            <a:pPr indent="0" marL="0">
+            <a:pPr marL="0" indent="0">
               <a:buNone/>
             </a:pPr>
             <a:r>
@@ -7381,7 +7162,7 @@
           <a:bodyPr wrap="square" rtlCol="0" anchor="ctr"/>
           <a:lstStyle/>
           <a:p>
-            <a:pPr indent="0" marL="0">
+            <a:pPr marL="0" indent="0">
               <a:lnSpc>
                 <a:spcPct val="125000"/>
               </a:lnSpc>
@@ -7428,7 +7209,7 @@
             <a:prstDash val="solid"/>
           </a:ln>
           <a:effectLst>
-            <a:outerShdw sx="100000" sy="100000" kx="0" ky="0" algn="bl" rotWithShape="0" blurRad="76200" dist="25400" dir="5400000">
+            <a:outerShdw blurRad="76200" dist="25400" dir="5400000" algn="bl" rotWithShape="0">
               <a:srgbClr val="94A3B8">
                 <a:alpha val="30000"/>
               </a:srgbClr>
@@ -7479,7 +7260,7 @@
           <a:bodyPr wrap="square" rtlCol="0" anchor="ctr"/>
           <a:lstStyle/>
           <a:p>
-            <a:pPr algn="ctr" indent="0" marL="0">
+            <a:pPr marL="0" indent="0" algn="ctr">
               <a:buNone/>
             </a:pPr>
             <a:r>
@@ -7518,7 +7299,7 @@
           <a:bodyPr wrap="square" rtlCol="0" anchor="ctr"/>
           <a:lstStyle/>
           <a:p>
-            <a:pPr indent="0" marL="0">
+            <a:pPr marL="0" indent="0">
               <a:buNone/>
             </a:pPr>
             <a:r>
@@ -7557,7 +7338,7 @@
           <a:bodyPr wrap="square" rtlCol="0" anchor="ctr"/>
           <a:lstStyle/>
           <a:p>
-            <a:pPr indent="0" marL="0">
+            <a:pPr marL="0" indent="0">
               <a:lnSpc>
                 <a:spcPct val="125000"/>
               </a:lnSpc>
@@ -7604,7 +7385,7 @@
             <a:prstDash val="solid"/>
           </a:ln>
           <a:effectLst>
-            <a:outerShdw sx="100000" sy="100000" kx="0" ky="0" algn="bl" rotWithShape="0" blurRad="76200" dist="25400" dir="5400000">
+            <a:outerShdw blurRad="76200" dist="25400" dir="5400000" algn="bl" rotWithShape="0">
               <a:srgbClr val="94A3B8">
                 <a:alpha val="30000"/>
               </a:srgbClr>
@@ -7655,7 +7436,7 @@
           <a:bodyPr wrap="square" rtlCol="0" anchor="ctr"/>
           <a:lstStyle/>
           <a:p>
-            <a:pPr algn="ctr" indent="0" marL="0">
+            <a:pPr marL="0" indent="0" algn="ctr">
               <a:buNone/>
             </a:pPr>
             <a:r>
@@ -7694,7 +7475,7 @@
           <a:bodyPr wrap="square" rtlCol="0" anchor="ctr"/>
           <a:lstStyle/>
           <a:p>
-            <a:pPr indent="0" marL="0">
+            <a:pPr marL="0" indent="0">
               <a:buNone/>
             </a:pPr>
             <a:r>
@@ -7733,7 +7514,7 @@
           <a:bodyPr wrap="square" rtlCol="0" anchor="ctr"/>
           <a:lstStyle/>
           <a:p>
-            <a:pPr indent="0" marL="0">
+            <a:pPr marL="0" indent="0">
               <a:lnSpc>
                 <a:spcPct val="125000"/>
               </a:lnSpc>
@@ -7775,7 +7556,7 @@
           <a:bodyPr wrap="square" rtlCol="0" anchor="ctr"/>
           <a:lstStyle/>
           <a:p>
-            <a:pPr indent="0" marL="0">
+            <a:pPr marL="0" indent="0">
               <a:buNone/>
             </a:pPr>
             <a:r>
@@ -7814,7 +7595,7 @@
           <a:bodyPr wrap="square" rtlCol="0" anchor="ctr"/>
           <a:lstStyle/>
           <a:p>
-            <a:pPr algn="r" indent="0" marL="0">
+            <a:pPr marL="0" indent="0" algn="r">
               <a:buNone/>
             </a:pPr>
             <a:r>
@@ -7848,6 +7629,7 @@
         <a:solidFill>
           <a:srgbClr val="F8FAFC"/>
         </a:solidFill>
+        <a:effectLst/>
       </p:bgPr>
     </p:bg>
     <p:spTree>
@@ -7885,11 +7667,11 @@
           <a:bodyPr wrap="square" rtlCol="0" anchor="ctr"/>
           <a:lstStyle/>
           <a:p>
-            <a:pPr indent="0" marL="0">
-              <a:buNone/>
-            </a:pPr>
-            <a:r>
-              <a:rPr lang="en-US" sz="1100" b="1" spc="200" kern="0" dirty="0">
+            <a:pPr marL="0" indent="0">
+              <a:buNone/>
+            </a:pPr>
+            <a:r>
+              <a:rPr lang="en-US" sz="1100" b="1" kern="0" spc="200" dirty="0">
                 <a:solidFill>
                   <a:srgbClr val="0D9488"/>
                 </a:solidFill>
@@ -7924,7 +7706,7 @@
           <a:bodyPr wrap="square" rtlCol="0" anchor="ctr"/>
           <a:lstStyle/>
           <a:p>
-            <a:pPr indent="0" marL="0">
+            <a:pPr marL="0" indent="0">
               <a:buNone/>
             </a:pPr>
             <a:r>
@@ -7963,7 +7745,7 @@
           <a:bodyPr wrap="square" rtlCol="0" anchor="ctr"/>
           <a:lstStyle/>
           <a:p>
-            <a:pPr indent="0" marL="0">
+            <a:pPr marL="0" indent="0">
               <a:buNone/>
             </a:pPr>
             <a:r>
@@ -8007,7 +7789,7 @@
             <a:prstDash val="solid"/>
           </a:ln>
           <a:effectLst>
-            <a:outerShdw sx="100000" sy="100000" kx="0" ky="0" algn="bl" rotWithShape="0" blurRad="76200" dist="25400" dir="5400000">
+            <a:outerShdw blurRad="76200" dist="25400" dir="5400000" algn="bl" rotWithShape="0">
               <a:srgbClr val="94A3B8">
                 <a:alpha val="30000"/>
               </a:srgbClr>
@@ -8017,14 +7799,14 @@
       </p:sp>
       <p:pic>
         <p:nvPicPr>
-          <p:cNvPr id="6" name="Image 0" descr="/sessions/nifty-kind-carson/mnt/outputs/shot1_login.png">    </p:cNvPr>
+          <p:cNvPr id="6" name="Image 0" descr="/sessions/nifty-kind-carson/mnt/outputs/shot1_login.png"/>
           <p:cNvPicPr>
             <a:picLocks noChangeAspect="1"/>
           </p:cNvPicPr>
           <p:nvPr/>
         </p:nvPicPr>
         <p:blipFill>
-          <a:blip r:embed="rId1"/>
+          <a:blip r:embed="rId3"/>
           <a:stretch>
             <a:fillRect/>
           </a:stretch>
@@ -8082,7 +7864,7 @@
           <a:bodyPr wrap="square" rtlCol="0" anchor="ctr"/>
           <a:lstStyle/>
           <a:p>
-            <a:pPr algn="ctr" indent="0" marL="0">
+            <a:pPr marL="0" indent="0" algn="ctr">
               <a:buNone/>
             </a:pPr>
             <a:r>
@@ -8121,7 +7903,7 @@
           <a:bodyPr wrap="square" rtlCol="0" anchor="ctr"/>
           <a:lstStyle/>
           <a:p>
-            <a:pPr indent="0" marL="0">
+            <a:pPr marL="0" indent="0">
               <a:lnSpc>
                 <a:spcPct val="110000"/>
               </a:lnSpc>
@@ -8185,7 +7967,7 @@
           <a:bodyPr wrap="square" rtlCol="0" anchor="ctr"/>
           <a:lstStyle/>
           <a:p>
-            <a:pPr algn="ctr" indent="0" marL="0">
+            <a:pPr marL="0" indent="0" algn="ctr">
               <a:buNone/>
             </a:pPr>
             <a:r>
@@ -8224,7 +8006,7 @@
           <a:bodyPr wrap="square" rtlCol="0" anchor="ctr"/>
           <a:lstStyle/>
           <a:p>
-            <a:pPr indent="0" marL="0">
+            <a:pPr marL="0" indent="0">
               <a:lnSpc>
                 <a:spcPct val="130000"/>
               </a:lnSpc>
@@ -8271,7 +8053,7 @@
             <a:prstDash val="solid"/>
           </a:ln>
           <a:effectLst>
-            <a:outerShdw sx="100000" sy="100000" kx="0" ky="0" algn="bl" rotWithShape="0" blurRad="76200" dist="25400" dir="5400000">
+            <a:outerShdw blurRad="76200" dist="25400" dir="5400000" algn="bl" rotWithShape="0">
               <a:srgbClr val="94A3B8">
                 <a:alpha val="30000"/>
               </a:srgbClr>
@@ -8281,14 +8063,14 @@
       </p:sp>
       <p:pic>
         <p:nvPicPr>
-          <p:cNvPr id="14" name="Image 1" descr="/sessions/nifty-kind-carson/mnt/outputs/shot2_library.png">    </p:cNvPr>
+          <p:cNvPr id="14" name="Image 1" descr="/sessions/nifty-kind-carson/mnt/outputs/shot2_library.png"/>
           <p:cNvPicPr>
             <a:picLocks noChangeAspect="1"/>
           </p:cNvPicPr>
           <p:nvPr/>
         </p:nvPicPr>
         <p:blipFill>
-          <a:blip r:embed="rId2"/>
+          <a:blip r:embed="rId4"/>
           <a:stretch>
             <a:fillRect/>
           </a:stretch>
@@ -8346,7 +8128,7 @@
           <a:bodyPr wrap="square" rtlCol="0" anchor="ctr"/>
           <a:lstStyle/>
           <a:p>
-            <a:pPr algn="ctr" indent="0" marL="0">
+            <a:pPr marL="0" indent="0" algn="ctr">
               <a:buNone/>
             </a:pPr>
             <a:r>
@@ -8385,7 +8167,7 @@
           <a:bodyPr wrap="square" rtlCol="0" anchor="ctr"/>
           <a:lstStyle/>
           <a:p>
-            <a:pPr indent="0" marL="0">
+            <a:pPr marL="0" indent="0">
               <a:lnSpc>
                 <a:spcPct val="110000"/>
               </a:lnSpc>
@@ -8449,7 +8231,7 @@
           <a:bodyPr wrap="square" rtlCol="0" anchor="ctr"/>
           <a:lstStyle/>
           <a:p>
-            <a:pPr algn="ctr" indent="0" marL="0">
+            <a:pPr marL="0" indent="0" algn="ctr">
               <a:buNone/>
             </a:pPr>
             <a:r>
@@ -8488,7 +8270,7 @@
           <a:bodyPr wrap="square" rtlCol="0" anchor="ctr"/>
           <a:lstStyle/>
           <a:p>
-            <a:pPr indent="0" marL="0">
+            <a:pPr marL="0" indent="0">
               <a:lnSpc>
                 <a:spcPct val="130000"/>
               </a:lnSpc>
@@ -8530,7 +8312,7 @@
           <a:bodyPr wrap="square" rtlCol="0" anchor="ctr"/>
           <a:lstStyle/>
           <a:p>
-            <a:pPr indent="0" marL="0">
+            <a:pPr marL="0" indent="0">
               <a:buNone/>
             </a:pPr>
             <a:r>
@@ -8569,7 +8351,7 @@
           <a:bodyPr wrap="square" rtlCol="0" anchor="ctr"/>
           <a:lstStyle/>
           <a:p>
-            <a:pPr algn="r" indent="0" marL="0">
+            <a:pPr marL="0" indent="0" algn="r">
               <a:buNone/>
             </a:pPr>
             <a:r>
@@ -8603,6 +8385,7 @@
         <a:solidFill>
           <a:srgbClr val="F8FAFC"/>
         </a:solidFill>
+        <a:effectLst/>
       </p:bgPr>
     </p:bg>
     <p:spTree>
@@ -8640,11 +8423,11 @@
           <a:bodyPr wrap="square" rtlCol="0" anchor="ctr"/>
           <a:lstStyle/>
           <a:p>
-            <a:pPr indent="0" marL="0">
-              <a:buNone/>
-            </a:pPr>
-            <a:r>
-              <a:rPr lang="en-US" sz="1100" b="1" spc="200" kern="0" dirty="0">
+            <a:pPr marL="0" indent="0">
+              <a:buNone/>
+            </a:pPr>
+            <a:r>
+              <a:rPr lang="en-US" sz="1100" b="1" kern="0" spc="200" dirty="0">
                 <a:solidFill>
                   <a:srgbClr val="0D9488"/>
                 </a:solidFill>
@@ -8679,7 +8462,7 @@
           <a:bodyPr wrap="square" rtlCol="0" anchor="ctr"/>
           <a:lstStyle/>
           <a:p>
-            <a:pPr indent="0" marL="0">
+            <a:pPr marL="0" indent="0">
               <a:buNone/>
             </a:pPr>
             <a:r>
@@ -8718,7 +8501,7 @@
           <a:bodyPr wrap="square" rtlCol="0" anchor="ctr"/>
           <a:lstStyle/>
           <a:p>
-            <a:pPr indent="0" marL="0">
+            <a:pPr marL="0" indent="0">
               <a:buNone/>
             </a:pPr>
             <a:r>
@@ -8762,7 +8545,7 @@
             <a:prstDash val="solid"/>
           </a:ln>
           <a:effectLst>
-            <a:outerShdw sx="100000" sy="100000" kx="0" ky="0" algn="bl" rotWithShape="0" blurRad="76200" dist="25400" dir="5400000">
+            <a:outerShdw blurRad="76200" dist="25400" dir="5400000" algn="bl" rotWithShape="0">
               <a:srgbClr val="94A3B8">
                 <a:alpha val="30000"/>
               </a:srgbClr>
@@ -8772,14 +8555,14 @@
       </p:sp>
       <p:pic>
         <p:nvPicPr>
-          <p:cNvPr id="6" name="Image 0" descr="/sessions/nifty-kind-carson/mnt/outputs/shot3_detail.png">    </p:cNvPr>
+          <p:cNvPr id="6" name="Image 0" descr="/sessions/nifty-kind-carson/mnt/outputs/shot3_detail.png"/>
           <p:cNvPicPr>
             <a:picLocks noChangeAspect="1"/>
           </p:cNvPicPr>
           <p:nvPr/>
         </p:nvPicPr>
         <p:blipFill>
-          <a:blip r:embed="rId1"/>
+          <a:blip r:embed="rId3"/>
           <a:stretch>
             <a:fillRect/>
           </a:stretch>
@@ -8837,7 +8620,7 @@
           <a:bodyPr wrap="square" rtlCol="0" anchor="ctr"/>
           <a:lstStyle/>
           <a:p>
-            <a:pPr algn="ctr" indent="0" marL="0">
+            <a:pPr marL="0" indent="0" algn="ctr">
               <a:buNone/>
             </a:pPr>
             <a:r>
@@ -8876,7 +8659,7 @@
           <a:bodyPr wrap="square" rtlCol="0" anchor="ctr"/>
           <a:lstStyle/>
           <a:p>
-            <a:pPr indent="0" marL="0">
+            <a:pPr marL="0" indent="0">
               <a:lnSpc>
                 <a:spcPct val="110000"/>
               </a:lnSpc>
@@ -8940,7 +8723,7 @@
           <a:bodyPr wrap="square" rtlCol="0" anchor="ctr"/>
           <a:lstStyle/>
           <a:p>
-            <a:pPr algn="ctr" indent="0" marL="0">
+            <a:pPr marL="0" indent="0" algn="ctr">
               <a:buNone/>
             </a:pPr>
             <a:r>
@@ -8979,7 +8762,7 @@
           <a:bodyPr wrap="square" rtlCol="0" anchor="ctr"/>
           <a:lstStyle/>
           <a:p>
-            <a:pPr indent="0" marL="0">
+            <a:pPr marL="0" indent="0">
               <a:lnSpc>
                 <a:spcPct val="130000"/>
               </a:lnSpc>
@@ -9026,7 +8809,7 @@
             <a:prstDash val="solid"/>
           </a:ln>
           <a:effectLst>
-            <a:outerShdw sx="100000" sy="100000" kx="0" ky="0" algn="bl" rotWithShape="0" blurRad="76200" dist="25400" dir="5400000">
+            <a:outerShdw blurRad="76200" dist="25400" dir="5400000" algn="bl" rotWithShape="0">
               <a:srgbClr val="94A3B8">
                 <a:alpha val="30000"/>
               </a:srgbClr>
@@ -9036,14 +8819,14 @@
       </p:sp>
       <p:pic>
         <p:nvPicPr>
-          <p:cNvPr id="14" name="Image 1" descr="/sessions/nifty-kind-carson/mnt/outputs/shot4_quick.png">    </p:cNvPr>
+          <p:cNvPr id="14" name="Image 1" descr="/sessions/nifty-kind-carson/mnt/outputs/shot4_quick.png"/>
           <p:cNvPicPr>
             <a:picLocks noChangeAspect="1"/>
           </p:cNvPicPr>
           <p:nvPr/>
         </p:nvPicPr>
         <p:blipFill>
-          <a:blip r:embed="rId2"/>
+          <a:blip r:embed="rId4"/>
           <a:stretch>
             <a:fillRect/>
           </a:stretch>
@@ -9101,7 +8884,7 @@
           <a:bodyPr wrap="square" rtlCol="0" anchor="ctr"/>
           <a:lstStyle/>
           <a:p>
-            <a:pPr algn="ctr" indent="0" marL="0">
+            <a:pPr marL="0" indent="0" algn="ctr">
               <a:buNone/>
             </a:pPr>
             <a:r>
@@ -9140,7 +8923,7 @@
           <a:bodyPr wrap="square" rtlCol="0" anchor="ctr"/>
           <a:lstStyle/>
           <a:p>
-            <a:pPr indent="0" marL="0">
+            <a:pPr marL="0" indent="0">
               <a:lnSpc>
                 <a:spcPct val="110000"/>
               </a:lnSpc>
@@ -9204,7 +8987,7 @@
           <a:bodyPr wrap="square" rtlCol="0" anchor="ctr"/>
           <a:lstStyle/>
           <a:p>
-            <a:pPr algn="ctr" indent="0" marL="0">
+            <a:pPr marL="0" indent="0" algn="ctr">
               <a:buNone/>
             </a:pPr>
             <a:r>
@@ -9243,7 +9026,7 @@
           <a:bodyPr wrap="square" rtlCol="0" anchor="ctr"/>
           <a:lstStyle/>
           <a:p>
-            <a:pPr indent="0" marL="0">
+            <a:pPr marL="0" indent="0">
               <a:lnSpc>
                 <a:spcPct val="130000"/>
               </a:lnSpc>
@@ -9285,7 +9068,7 @@
           <a:bodyPr wrap="square" rtlCol="0" anchor="ctr"/>
           <a:lstStyle/>
           <a:p>
-            <a:pPr indent="0" marL="0">
+            <a:pPr marL="0" indent="0">
               <a:buNone/>
             </a:pPr>
             <a:r>
@@ -9324,7 +9107,7 @@
           <a:bodyPr wrap="square" rtlCol="0" anchor="ctr"/>
           <a:lstStyle/>
           <a:p>
-            <a:pPr algn="r" indent="0" marL="0">
+            <a:pPr marL="0" indent="0" algn="r">
               <a:buNone/>
             </a:pPr>
             <a:r>
@@ -9358,6 +9141,7 @@
         <a:solidFill>
           <a:srgbClr val="F8FAFC"/>
         </a:solidFill>
+        <a:effectLst/>
       </p:bgPr>
     </p:bg>
     <p:spTree>
@@ -9395,11 +9179,11 @@
           <a:bodyPr wrap="square" rtlCol="0" anchor="ctr"/>
           <a:lstStyle/>
           <a:p>
-            <a:pPr indent="0" marL="0">
-              <a:buNone/>
-            </a:pPr>
-            <a:r>
-              <a:rPr lang="en-US" sz="1100" b="1" spc="200" kern="0" dirty="0">
+            <a:pPr marL="0" indent="0">
+              <a:buNone/>
+            </a:pPr>
+            <a:r>
+              <a:rPr lang="en-US" sz="1100" b="1" kern="0" spc="200" dirty="0">
                 <a:solidFill>
                   <a:srgbClr val="0D9488"/>
                 </a:solidFill>
@@ -9434,7 +9218,7 @@
           <a:bodyPr wrap="square" rtlCol="0" anchor="ctr"/>
           <a:lstStyle/>
           <a:p>
-            <a:pPr indent="0" marL="0">
+            <a:pPr marL="0" indent="0">
               <a:buNone/>
             </a:pPr>
             <a:r>
@@ -9473,7 +9257,7 @@
           <a:bodyPr wrap="square" rtlCol="0" anchor="ctr"/>
           <a:lstStyle/>
           <a:p>
-            <a:pPr indent="0" marL="0">
+            <a:pPr marL="0" indent="0">
               <a:buNone/>
             </a:pPr>
             <a:r>
@@ -9517,7 +9301,7 @@
             <a:prstDash val="solid"/>
           </a:ln>
           <a:effectLst>
-            <a:outerShdw sx="100000" sy="100000" kx="0" ky="0" algn="bl" rotWithShape="0" blurRad="76200" dist="25400" dir="5400000">
+            <a:outerShdw blurRad="76200" dist="25400" dir="5400000" algn="bl" rotWithShape="0">
               <a:srgbClr val="94A3B8">
                 <a:alpha val="30000"/>
               </a:srgbClr>
@@ -9527,14 +9311,14 @@
       </p:sp>
       <p:pic>
         <p:nvPicPr>
-          <p:cNvPr id="6" name="Image 0" descr="/sessions/nifty-kind-carson/mnt/outputs/shot5_ai.png">    </p:cNvPr>
+          <p:cNvPr id="6" name="Image 0" descr="/sessions/nifty-kind-carson/mnt/outputs/shot5_ai.png"/>
           <p:cNvPicPr>
             <a:picLocks noChangeAspect="1"/>
           </p:cNvPicPr>
           <p:nvPr/>
         </p:nvPicPr>
         <p:blipFill>
-          <a:blip r:embed="rId1"/>
+          <a:blip r:embed="rId3"/>
           <a:stretch>
             <a:fillRect/>
           </a:stretch>
@@ -9592,7 +9376,7 @@
           <a:bodyPr wrap="square" rtlCol="0" anchor="ctr"/>
           <a:lstStyle/>
           <a:p>
-            <a:pPr algn="ctr" indent="0" marL="0">
+            <a:pPr marL="0" indent="0" algn="ctr">
               <a:buNone/>
             </a:pPr>
             <a:r>
@@ -9631,7 +9415,7 @@
           <a:bodyPr wrap="square" rtlCol="0" anchor="ctr"/>
           <a:lstStyle/>
           <a:p>
-            <a:pPr indent="0" marL="0">
+            <a:pPr marL="0" indent="0">
               <a:lnSpc>
                 <a:spcPct val="110000"/>
               </a:lnSpc>
@@ -9695,7 +9479,7 @@
           <a:bodyPr wrap="square" rtlCol="0" anchor="ctr"/>
           <a:lstStyle/>
           <a:p>
-            <a:pPr algn="ctr" indent="0" marL="0">
+            <a:pPr marL="0" indent="0" algn="ctr">
               <a:buNone/>
             </a:pPr>
             <a:r>
@@ -9734,7 +9518,7 @@
           <a:bodyPr wrap="square" rtlCol="0" anchor="ctr"/>
           <a:lstStyle/>
           <a:p>
-            <a:pPr indent="0" marL="0">
+            <a:pPr marL="0" indent="0">
               <a:lnSpc>
                 <a:spcPct val="130000"/>
               </a:lnSpc>
@@ -9781,7 +9565,7 @@
             <a:prstDash val="solid"/>
           </a:ln>
           <a:effectLst>
-            <a:outerShdw sx="100000" sy="100000" kx="0" ky="0" algn="bl" rotWithShape="0" blurRad="76200" dist="25400" dir="5400000">
+            <a:outerShdw blurRad="76200" dist="25400" dir="5400000" algn="bl" rotWithShape="0">
               <a:srgbClr val="94A3B8">
                 <a:alpha val="30000"/>
               </a:srgbClr>
@@ -9791,14 +9575,14 @@
       </p:sp>
       <p:pic>
         <p:nvPicPr>
-          <p:cNvPr id="14" name="Image 1" descr="/sessions/nifty-kind-carson/mnt/outputs/shot6_insights.png">    </p:cNvPr>
+          <p:cNvPr id="14" name="Image 1" descr="/sessions/nifty-kind-carson/mnt/outputs/shot6_insights.png"/>
           <p:cNvPicPr>
             <a:picLocks noChangeAspect="1"/>
           </p:cNvPicPr>
           <p:nvPr/>
         </p:nvPicPr>
         <p:blipFill>
-          <a:blip r:embed="rId2"/>
+          <a:blip r:embed="rId4"/>
           <a:stretch>
             <a:fillRect/>
           </a:stretch>
@@ -9856,7 +9640,7 @@
           <a:bodyPr wrap="square" rtlCol="0" anchor="ctr"/>
           <a:lstStyle/>
           <a:p>
-            <a:pPr algn="ctr" indent="0" marL="0">
+            <a:pPr marL="0" indent="0" algn="ctr">
               <a:buNone/>
             </a:pPr>
             <a:r>
@@ -9895,7 +9679,7 @@
           <a:bodyPr wrap="square" rtlCol="0" anchor="ctr"/>
           <a:lstStyle/>
           <a:p>
-            <a:pPr indent="0" marL="0">
+            <a:pPr marL="0" indent="0">
               <a:lnSpc>
                 <a:spcPct val="110000"/>
               </a:lnSpc>
@@ -9959,7 +9743,7 @@
           <a:bodyPr wrap="square" rtlCol="0" anchor="ctr"/>
           <a:lstStyle/>
           <a:p>
-            <a:pPr algn="ctr" indent="0" marL="0">
+            <a:pPr marL="0" indent="0" algn="ctr">
               <a:buNone/>
             </a:pPr>
             <a:r>
@@ -9998,7 +9782,7 @@
           <a:bodyPr wrap="square" rtlCol="0" anchor="ctr"/>
           <a:lstStyle/>
           <a:p>
-            <a:pPr indent="0" marL="0">
+            <a:pPr marL="0" indent="0">
               <a:lnSpc>
                 <a:spcPct val="130000"/>
               </a:lnSpc>
@@ -10040,7 +9824,7 @@
           <a:bodyPr wrap="square" rtlCol="0" anchor="ctr"/>
           <a:lstStyle/>
           <a:p>
-            <a:pPr indent="0" marL="0">
+            <a:pPr marL="0" indent="0">
               <a:buNone/>
             </a:pPr>
             <a:r>
@@ -10079,7 +9863,7 @@
           <a:bodyPr wrap="square" rtlCol="0" anchor="ctr"/>
           <a:lstStyle/>
           <a:p>
-            <a:pPr algn="r" indent="0" marL="0">
+            <a:pPr marL="0" indent="0" algn="r">
               <a:buNone/>
             </a:pPr>
             <a:r>
@@ -10113,6 +9897,7 @@
         <a:solidFill>
           <a:srgbClr val="F8FAFC"/>
         </a:solidFill>
+        <a:effectLst/>
       </p:bgPr>
     </p:bg>
     <p:spTree>
@@ -10150,11 +9935,11 @@
           <a:bodyPr wrap="square" rtlCol="0" anchor="ctr"/>
           <a:lstStyle/>
           <a:p>
-            <a:pPr indent="0" marL="0">
-              <a:buNone/>
-            </a:pPr>
-            <a:r>
-              <a:rPr lang="en-US" sz="1100" b="1" spc="200" kern="0" dirty="0">
+            <a:pPr marL="0" indent="0">
+              <a:buNone/>
+            </a:pPr>
+            <a:r>
+              <a:rPr lang="en-US" sz="1100" b="1" kern="0" spc="200" dirty="0">
                 <a:solidFill>
                   <a:srgbClr val="0D9488"/>
                 </a:solidFill>
@@ -10189,7 +9974,7 @@
           <a:bodyPr wrap="square" rtlCol="0" anchor="ctr"/>
           <a:lstStyle/>
           <a:p>
-            <a:pPr indent="0" marL="0">
+            <a:pPr marL="0" indent="0">
               <a:buNone/>
             </a:pPr>
             <a:r>
@@ -10228,7 +10013,7 @@
           <a:bodyPr wrap="square" rtlCol="0" anchor="ctr"/>
           <a:lstStyle/>
           <a:p>
-            <a:pPr indent="0" marL="0">
+            <a:pPr marL="0" indent="0">
               <a:buNone/>
             </a:pPr>
             <a:r>
@@ -10272,7 +10057,7 @@
             <a:prstDash val="solid"/>
           </a:ln>
           <a:effectLst>
-            <a:outerShdw sx="100000" sy="100000" kx="0" ky="0" algn="bl" rotWithShape="0" blurRad="76200" dist="25400" dir="5400000">
+            <a:outerShdw blurRad="76200" dist="25400" dir="5400000" algn="bl" rotWithShape="0">
               <a:srgbClr val="94A3B8">
                 <a:alpha val="30000"/>
               </a:srgbClr>
@@ -10282,14 +10067,14 @@
       </p:sp>
       <p:pic>
         <p:nvPicPr>
-          <p:cNvPr id="6" name="Image 0" descr="/sessions/nifty-kind-carson/mnt/outputs/shot7_karte.png">    </p:cNvPr>
+          <p:cNvPr id="6" name="Image 0" descr="/sessions/nifty-kind-carson/mnt/outputs/shot7_karte.png"/>
           <p:cNvPicPr>
             <a:picLocks noChangeAspect="1"/>
           </p:cNvPicPr>
           <p:nvPr/>
         </p:nvPicPr>
         <p:blipFill>
-          <a:blip r:embed="rId1"/>
+          <a:blip r:embed="rId3"/>
           <a:stretch>
             <a:fillRect/>
           </a:stretch>
@@ -10347,7 +10132,7 @@
           <a:bodyPr wrap="square" rtlCol="0" anchor="ctr"/>
           <a:lstStyle/>
           <a:p>
-            <a:pPr algn="ctr" indent="0" marL="0">
+            <a:pPr marL="0" indent="0" algn="ctr">
               <a:buNone/>
             </a:pPr>
             <a:r>
@@ -10386,7 +10171,7 @@
           <a:bodyPr wrap="square" rtlCol="0" anchor="ctr"/>
           <a:lstStyle/>
           <a:p>
-            <a:pPr indent="0" marL="0">
+            <a:pPr marL="0" indent="0">
               <a:lnSpc>
                 <a:spcPct val="110000"/>
               </a:lnSpc>
@@ -10450,7 +10235,7 @@
           <a:bodyPr wrap="square" rtlCol="0" anchor="ctr"/>
           <a:lstStyle/>
           <a:p>
-            <a:pPr algn="ctr" indent="0" marL="0">
+            <a:pPr marL="0" indent="0" algn="ctr">
               <a:buNone/>
             </a:pPr>
             <a:r>
@@ -10489,7 +10274,7 @@
           <a:bodyPr wrap="square" rtlCol="0" anchor="ctr"/>
           <a:lstStyle/>
           <a:p>
-            <a:pPr indent="0" marL="0">
+            <a:pPr marL="0" indent="0">
               <a:lnSpc>
                 <a:spcPct val="130000"/>
               </a:lnSpc>
@@ -10536,7 +10321,7 @@
             <a:prstDash val="solid"/>
           </a:ln>
           <a:effectLst>
-            <a:outerShdw sx="100000" sy="100000" kx="0" ky="0" algn="bl" rotWithShape="0" blurRad="76200" dist="25400" dir="5400000">
+            <a:outerShdw blurRad="76200" dist="25400" dir="5400000" algn="bl" rotWithShape="0">
               <a:srgbClr val="94A3B8">
                 <a:alpha val="30000"/>
               </a:srgbClr>
@@ -10546,14 +10331,14 @@
       </p:sp>
       <p:pic>
         <p:nvPicPr>
-          <p:cNvPr id="14" name="Image 1" descr="/sessions/nifty-kind-carson/mnt/outputs/shot8_settings.png">    </p:cNvPr>
+          <p:cNvPr id="14" name="Image 1" descr="/sessions/nifty-kind-carson/mnt/outputs/shot8_settings.png"/>
           <p:cNvPicPr>
             <a:picLocks noChangeAspect="1"/>
           </p:cNvPicPr>
           <p:nvPr/>
         </p:nvPicPr>
         <p:blipFill>
-          <a:blip r:embed="rId2"/>
+          <a:blip r:embed="rId4"/>
           <a:stretch>
             <a:fillRect/>
           </a:stretch>
@@ -10611,7 +10396,7 @@
           <a:bodyPr wrap="square" rtlCol="0" anchor="ctr"/>
           <a:lstStyle/>
           <a:p>
-            <a:pPr algn="ctr" indent="0" marL="0">
+            <a:pPr marL="0" indent="0" algn="ctr">
               <a:buNone/>
             </a:pPr>
             <a:r>
@@ -10650,7 +10435,7 @@
           <a:bodyPr wrap="square" rtlCol="0" anchor="ctr"/>
           <a:lstStyle/>
           <a:p>
-            <a:pPr indent="0" marL="0">
+            <a:pPr marL="0" indent="0">
               <a:lnSpc>
                 <a:spcPct val="110000"/>
               </a:lnSpc>
@@ -10714,7 +10499,7 @@
           <a:bodyPr wrap="square" rtlCol="0" anchor="ctr"/>
           <a:lstStyle/>
           <a:p>
-            <a:pPr algn="ctr" indent="0" marL="0">
+            <a:pPr marL="0" indent="0" algn="ctr">
               <a:buNone/>
             </a:pPr>
             <a:r>
@@ -10753,7 +10538,7 @@
           <a:bodyPr wrap="square" rtlCol="0" anchor="ctr"/>
           <a:lstStyle/>
           <a:p>
-            <a:pPr indent="0" marL="0">
+            <a:pPr marL="0" indent="0">
               <a:lnSpc>
                 <a:spcPct val="130000"/>
               </a:lnSpc>
@@ -10795,7 +10580,7 @@
           <a:bodyPr wrap="square" rtlCol="0" anchor="ctr"/>
           <a:lstStyle/>
           <a:p>
-            <a:pPr indent="0" marL="0">
+            <a:pPr marL="0" indent="0">
               <a:buNone/>
             </a:pPr>
             <a:r>
@@ -10834,7 +10619,7 @@
           <a:bodyPr wrap="square" rtlCol="0" anchor="ctr"/>
           <a:lstStyle/>
           <a:p>
-            <a:pPr algn="r" indent="0" marL="0">
+            <a:pPr marL="0" indent="0" algn="r">
               <a:buNone/>
             </a:pPr>
             <a:r>
@@ -11153,4 +10938,299 @@
     </a:ext>
   </a:extLst>
 </a:theme>
+</file>
+
+<file path=ppt/theme/theme2.xml><?xml version="1.0" encoding="utf-8"?>
+<a:theme xmlns:a="http://schemas.openxmlformats.org/drawingml/2006/main" name="Office テーマ">
+  <a:themeElements>
+    <a:clrScheme name="Office">
+      <a:dk1>
+        <a:sysClr val="windowText" lastClr="000000"/>
+      </a:dk1>
+      <a:lt1>
+        <a:sysClr val="window" lastClr="FFFFFF"/>
+      </a:lt1>
+      <a:dk2>
+        <a:srgbClr val="44546A"/>
+      </a:dk2>
+      <a:lt2>
+        <a:srgbClr val="E7E6E6"/>
+      </a:lt2>
+      <a:accent1>
+        <a:srgbClr val="4472C4"/>
+      </a:accent1>
+      <a:accent2>
+        <a:srgbClr val="ED7D31"/>
+      </a:accent2>
+      <a:accent3>
+        <a:srgbClr val="A5A5A5"/>
+      </a:accent3>
+      <a:accent4>
+        <a:srgbClr val="FFC000"/>
+      </a:accent4>
+      <a:accent5>
+        <a:srgbClr val="5B9BD5"/>
+      </a:accent5>
+      <a:accent6>
+        <a:srgbClr val="70AD47"/>
+      </a:accent6>
+      <a:hlink>
+        <a:srgbClr val="0563C1"/>
+      </a:hlink>
+      <a:folHlink>
+        <a:srgbClr val="954F72"/>
+      </a:folHlink>
+    </a:clrScheme>
+    <a:fontScheme name="Office">
+      <a:majorFont>
+        <a:latin typeface="游ゴシック Light" panose="020F0302020204030204"/>
+        <a:ea typeface=""/>
+        <a:cs typeface=""/>
+        <a:font script="Jpan" typeface="游ゴシック Light"/>
+        <a:font script="Hang" typeface="맑은 고딕"/>
+        <a:font script="Hans" typeface="等线 Light"/>
+        <a:font script="Hant" typeface="新細明體"/>
+        <a:font script="Arab" typeface="Times New Roman"/>
+        <a:font script="Hebr" typeface="Times New Roman"/>
+        <a:font script="Thai" typeface="Angsana New"/>
+        <a:font script="Ethi" typeface="Nyala"/>
+        <a:font script="Beng" typeface="Vrinda"/>
+        <a:font script="Gujr" typeface="Shruti"/>
+        <a:font script="Khmr" typeface="MoolBoran"/>
+        <a:font script="Knda" typeface="Tunga"/>
+        <a:font script="Guru" typeface="Raavi"/>
+        <a:font script="Cans" typeface="Euphemia"/>
+        <a:font script="Cher" typeface="Plantagenet Cherokee"/>
+        <a:font script="Yiii" typeface="Microsoft Yi Baiti"/>
+        <a:font script="Tibt" typeface="Microsoft Himalaya"/>
+        <a:font script="Thaa" typeface="MV Boli"/>
+        <a:font script="Deva" typeface="Mangal"/>
+        <a:font script="Telu" typeface="Gautami"/>
+        <a:font script="Taml" typeface="Latha"/>
+        <a:font script="Syrc" typeface="Estrangelo Edessa"/>
+        <a:font script="Orya" typeface="Kalinga"/>
+        <a:font script="Mlym" typeface="Kartika"/>
+        <a:font script="Laoo" typeface="DokChampa"/>
+        <a:font script="Sinh" typeface="Iskoola Pota"/>
+        <a:font script="Mong" typeface="Mongolian Baiti"/>
+        <a:font script="Viet" typeface="Times New Roman"/>
+        <a:font script="Uigh" typeface="Microsoft Uighur"/>
+        <a:font script="Geor" typeface="Sylfaen"/>
+        <a:font script="Armn" typeface="Arial"/>
+        <a:font script="Bugi" typeface="Leelawadee UI"/>
+        <a:font script="Bopo" typeface="Microsoft JhengHei"/>
+        <a:font script="Java" typeface="Javanese Text"/>
+        <a:font script="Lisu" typeface="Segoe UI"/>
+        <a:font script="Mymr" typeface="Myanmar Text"/>
+        <a:font script="Nkoo" typeface="Ebrima"/>
+        <a:font script="Olck" typeface="Nirmala UI"/>
+        <a:font script="Osma" typeface="Ebrima"/>
+        <a:font script="Phag" typeface="Phagspa"/>
+        <a:font script="Syrn" typeface="Estrangelo Edessa"/>
+        <a:font script="Syrj" typeface="Estrangelo Edessa"/>
+        <a:font script="Syre" typeface="Estrangelo Edessa"/>
+        <a:font script="Sora" typeface="Nirmala UI"/>
+        <a:font script="Tale" typeface="Microsoft Tai Le"/>
+        <a:font script="Talu" typeface="Microsoft New Tai Lue"/>
+        <a:font script="Tfng" typeface="Ebrima"/>
+      </a:majorFont>
+      <a:minorFont>
+        <a:latin typeface="游ゴシック" panose="020F0502020204030204"/>
+        <a:ea typeface=""/>
+        <a:cs typeface=""/>
+        <a:font script="Jpan" typeface="游ゴシック"/>
+        <a:font script="Hang" typeface="맑은 고딕"/>
+        <a:font script="Hans" typeface="等线"/>
+        <a:font script="Hant" typeface="新細明體"/>
+        <a:font script="Arab" typeface="Arial"/>
+        <a:font script="Hebr" typeface="Arial"/>
+        <a:font script="Thai" typeface="Cordia New"/>
+        <a:font script="Ethi" typeface="Nyala"/>
+        <a:font script="Beng" typeface="Vrinda"/>
+        <a:font script="Gujr" typeface="Shruti"/>
+        <a:font script="Khmr" typeface="DaunPenh"/>
+        <a:font script="Knda" typeface="Tunga"/>
+        <a:font script="Guru" typeface="Raavi"/>
+        <a:font script="Cans" typeface="Euphemia"/>
+        <a:font script="Cher" typeface="Plantagenet Cherokee"/>
+        <a:font script="Yiii" typeface="Microsoft Yi Baiti"/>
+        <a:font script="Tibt" typeface="Microsoft Himalaya"/>
+        <a:font script="Thaa" typeface="MV Boli"/>
+        <a:font script="Deva" typeface="Mangal"/>
+        <a:font script="Telu" typeface="Gautami"/>
+        <a:font script="Taml" typeface="Latha"/>
+        <a:font script="Syrc" typeface="Estrangelo Edessa"/>
+        <a:font script="Orya" typeface="Kalinga"/>
+        <a:font script="Mlym" typeface="Kartika"/>
+        <a:font script="Laoo" typeface="DokChampa"/>
+        <a:font script="Sinh" typeface="Iskoola Pota"/>
+        <a:font script="Mong" typeface="Mongolian Baiti"/>
+        <a:font script="Viet" typeface="Arial"/>
+        <a:font script="Uigh" typeface="Microsoft Uighur"/>
+        <a:font script="Geor" typeface="Sylfaen"/>
+        <a:font script="Armn" typeface="Arial"/>
+        <a:font script="Bugi" typeface="Leelawadee UI"/>
+        <a:font script="Bopo" typeface="Microsoft JhengHei"/>
+        <a:font script="Java" typeface="Javanese Text"/>
+        <a:font script="Lisu" typeface="Segoe UI"/>
+        <a:font script="Mymr" typeface="Myanmar Text"/>
+        <a:font script="Nkoo" typeface="Ebrima"/>
+        <a:font script="Olck" typeface="Nirmala UI"/>
+        <a:font script="Osma" typeface="Ebrima"/>
+        <a:font script="Phag" typeface="Phagspa"/>
+        <a:font script="Syrn" typeface="Estrangelo Edessa"/>
+        <a:font script="Syrj" typeface="Estrangelo Edessa"/>
+        <a:font script="Syre" typeface="Estrangelo Edessa"/>
+        <a:font script="Sora" typeface="Nirmala UI"/>
+        <a:font script="Tale" typeface="Microsoft Tai Le"/>
+        <a:font script="Talu" typeface="Microsoft New Tai Lue"/>
+        <a:font script="Tfng" typeface="Ebrima"/>
+      </a:minorFont>
+    </a:fontScheme>
+    <a:fmtScheme name="Office">
+      <a:fillStyleLst>
+        <a:solidFill>
+          <a:schemeClr val="phClr"/>
+        </a:solidFill>
+        <a:gradFill rotWithShape="1">
+          <a:gsLst>
+            <a:gs pos="0">
+              <a:schemeClr val="phClr">
+                <a:lumMod val="110000"/>
+                <a:satMod val="105000"/>
+                <a:tint val="67000"/>
+              </a:schemeClr>
+            </a:gs>
+            <a:gs pos="50000">
+              <a:schemeClr val="phClr">
+                <a:lumMod val="105000"/>
+                <a:satMod val="103000"/>
+                <a:tint val="73000"/>
+              </a:schemeClr>
+            </a:gs>
+            <a:gs pos="100000">
+              <a:schemeClr val="phClr">
+                <a:lumMod val="105000"/>
+                <a:satMod val="109000"/>
+                <a:tint val="81000"/>
+              </a:schemeClr>
+            </a:gs>
+          </a:gsLst>
+          <a:lin ang="5400000" scaled="0"/>
+        </a:gradFill>
+        <a:gradFill rotWithShape="1">
+          <a:gsLst>
+            <a:gs pos="0">
+              <a:schemeClr val="phClr">
+                <a:satMod val="103000"/>
+                <a:lumMod val="102000"/>
+                <a:tint val="94000"/>
+              </a:schemeClr>
+            </a:gs>
+            <a:gs pos="50000">
+              <a:schemeClr val="phClr">
+                <a:satMod val="110000"/>
+                <a:lumMod val="100000"/>
+                <a:shade val="100000"/>
+              </a:schemeClr>
+            </a:gs>
+            <a:gs pos="100000">
+              <a:schemeClr val="phClr">
+                <a:lumMod val="99000"/>
+                <a:satMod val="120000"/>
+                <a:shade val="78000"/>
+              </a:schemeClr>
+            </a:gs>
+          </a:gsLst>
+          <a:lin ang="5400000" scaled="0"/>
+        </a:gradFill>
+      </a:fillStyleLst>
+      <a:lnStyleLst>
+        <a:ln w="6350" cap="flat" cmpd="sng" algn="ctr">
+          <a:solidFill>
+            <a:schemeClr val="phClr"/>
+          </a:solidFill>
+          <a:prstDash val="solid"/>
+          <a:miter lim="800000"/>
+        </a:ln>
+        <a:ln w="12700" cap="flat" cmpd="sng" algn="ctr">
+          <a:solidFill>
+            <a:schemeClr val="phClr"/>
+          </a:solidFill>
+          <a:prstDash val="solid"/>
+          <a:miter lim="800000"/>
+        </a:ln>
+        <a:ln w="19050" cap="flat" cmpd="sng" algn="ctr">
+          <a:solidFill>
+            <a:schemeClr val="phClr"/>
+          </a:solidFill>
+          <a:prstDash val="solid"/>
+          <a:miter lim="800000"/>
+        </a:ln>
+      </a:lnStyleLst>
+      <a:effectStyleLst>
+        <a:effectStyle>
+          <a:effectLst/>
+        </a:effectStyle>
+        <a:effectStyle>
+          <a:effectLst/>
+        </a:effectStyle>
+        <a:effectStyle>
+          <a:effectLst>
+            <a:outerShdw blurRad="57150" dist="19050" dir="5400000" algn="ctr" rotWithShape="0">
+              <a:srgbClr val="000000">
+                <a:alpha val="63000"/>
+              </a:srgbClr>
+            </a:outerShdw>
+          </a:effectLst>
+        </a:effectStyle>
+      </a:effectStyleLst>
+      <a:bgFillStyleLst>
+        <a:solidFill>
+          <a:schemeClr val="phClr"/>
+        </a:solidFill>
+        <a:solidFill>
+          <a:schemeClr val="phClr">
+            <a:tint val="95000"/>
+            <a:satMod val="170000"/>
+          </a:schemeClr>
+        </a:solidFill>
+        <a:gradFill rotWithShape="1">
+          <a:gsLst>
+            <a:gs pos="0">
+              <a:schemeClr val="phClr">
+                <a:tint val="93000"/>
+                <a:satMod val="150000"/>
+                <a:shade val="98000"/>
+                <a:lumMod val="102000"/>
+              </a:schemeClr>
+            </a:gs>
+            <a:gs pos="50000">
+              <a:schemeClr val="phClr">
+                <a:tint val="98000"/>
+                <a:satMod val="130000"/>
+                <a:shade val="90000"/>
+                <a:lumMod val="103000"/>
+              </a:schemeClr>
+            </a:gs>
+            <a:gs pos="100000">
+              <a:schemeClr val="phClr">
+                <a:shade val="63000"/>
+                <a:satMod val="120000"/>
+              </a:schemeClr>
+            </a:gs>
+          </a:gsLst>
+          <a:lin ang="5400000" scaled="0"/>
+        </a:gradFill>
+      </a:bgFillStyleLst>
+    </a:fmtScheme>
+  </a:themeElements>
+  <a:objectDefaults/>
+  <a:extraClrSchemeLst/>
+  <a:extLst>
+    <a:ext uri="{05A4C25C-085E-4340-85A3-A5531E510DB2}">
+      <thm15:themeFamily xmlns:thm15="http://schemas.microsoft.com/office/thememl/2012/main" name="Office Theme" id="{62F939B6-93AF-4DB8-9C6B-D6C7DFDC589F}" vid="{4A3C46E8-61CC-4603-A589-7422A47A8E4A}"/>
+    </a:ext>
+  </a:extLst>
+</a:theme>
 </file>